--- a/doc/reports/presentation.pptx
+++ b/doc/reports/presentation.pptx
@@ -3682,6 +3682,45 @@
           </a:p>
         </p:txBody>
       </p:sp>
+      <p:sp>
+        <p:nvSpPr>
+          <p:cNvPr id="6" name="TextBox 5"/>
+          <p:cNvSpPr txBox="1"/>
+          <p:nvPr/>
+        </p:nvSpPr>
+        <p:spPr>
+          <a:xfrm>
+            <a:off x="700000" y="2910000"/>
+            <a:ext cx="10500000" cy="500000"/>
+          </a:xfrm>
+          <a:prstGeom prst="rect">
+            <a:avLst/>
+          </a:prstGeom>
+          <a:noFill/>
+        </p:spPr>
+        <p:txBody>
+          <a:bodyPr wrap="square">
+            <a:spAutoFit/>
+          </a:bodyPr>
+          <a:lstStyle/>
+          <a:p>
+            <a:pPr>
+              <a:spcAft>
+                <a:spcPts val="1000"/>
+              </a:spcAft>
+            </a:pPr>
+            <a:r>
+              <a:rPr sz="1600">
+                <a:solidFill>
+                  <a:srgbClr val="16191D"/>
+                </a:solidFill>
+                <a:latin typeface="Apple SD Gothic Neo"/>
+              </a:rPr>
+              <a:t>• 라우팅 공백 — PDF 9쪽 예시 질의 10개를 돌리니 7개가 chat으로 떨어졌다 · 결정론 백엔드의 라우팅 정규식이 7개 키워드뿐이었다 → 3/10 → 수정 후 10/10</a:t>
+            </a:r>
+          </a:p>
+        </p:txBody>
+      </p:sp>
     </p:spTree>
   </p:cSld>
   <p:clrMapOvr>
@@ -4602,7 +4641,7 @@
         </p:nvGraphicFramePr>
         <p:xfrm>
           <a:off x="600000" y="1350000"/>
-          <a:ext cx="11000000" cy="2940000"/>
+          <a:ext cx="11000000" cy="3360000"/>
         </p:xfrm>
         <a:graphic>
           <a:graphicData uri="http://schemas.openxmlformats.org/drawingml/2006/table">
@@ -5190,6 +5229,88 @@
                   <a:tcPr/>
                 </a:tc>
               </a:tr>
+              <a:tr h="420000">
+                <a:tc>
+                  <a:txBody>
+                    <a:bodyPr/>
+                    <a:lstStyle/>
+                    <a:p>
+                      <a:pPr>
+                        <a:defRPr sz="1400" b="0">
+                          <a:solidFill>
+                            <a:srgbClr val="16191D"/>
+                          </a:solidFill>
+                          <a:latin typeface="Apple SD Gothic Neo"/>
+                        </a:defRPr>
+                      </a:pPr>
+                      <a:r>
+                        <a:t>회귀 질의 10문항 (PDF 9쪽)</a:t>
+                      </a:r>
+                    </a:p>
+                  </a:txBody>
+                  <a:tcPr/>
+                </a:tc>
+                <a:tc>
+                  <a:txBody>
+                    <a:bodyPr/>
+                    <a:lstStyle/>
+                    <a:p>
+                      <a:pPr algn="r">
+                        <a:defRPr sz="1400" b="0">
+                          <a:solidFill>
+                            <a:srgbClr val="16191D"/>
+                          </a:solidFill>
+                          <a:latin typeface="Apple SD Gothic Neo"/>
+                        </a:defRPr>
+                      </a:pPr>
+                      <a:r>
+                        <a:t>3/10</a:t>
+                      </a:r>
+                    </a:p>
+                  </a:txBody>
+                  <a:tcPr/>
+                </a:tc>
+                <a:tc>
+                  <a:txBody>
+                    <a:bodyPr/>
+                    <a:lstStyle/>
+                    <a:p>
+                      <a:pPr algn="r">
+                        <a:defRPr sz="1400" b="0">
+                          <a:solidFill>
+                            <a:srgbClr val="16191D"/>
+                          </a:solidFill>
+                          <a:latin typeface="Apple SD Gothic Neo"/>
+                        </a:defRPr>
+                      </a:pPr>
+                      <a:r>
+                        <a:t>10/10</a:t>
+                      </a:r>
+                    </a:p>
+                  </a:txBody>
+                  <a:tcPr/>
+                </a:tc>
+                <a:tc>
+                  <a:txBody>
+                    <a:bodyPr/>
+                    <a:lstStyle/>
+                    <a:p>
+                      <a:pPr algn="r">
+                        <a:defRPr sz="1400" b="0">
+                          <a:solidFill>
+                            <a:srgbClr val="16191D"/>
+                          </a:solidFill>
+                          <a:latin typeface="Apple SD Gothic Neo"/>
+                        </a:defRPr>
+                      </a:pPr>
+                      <a:r>
+                        <a:t>+0.7000</a:t>
+                      </a:r>
+                    </a:p>
+                  </a:txBody>
+                  <a:tcPr/>
+                </a:tc>
+              </a:tr>
             </a:tbl>
           </a:graphicData>
         </a:graphic>

--- a/doc/reports/presentation.pptx
+++ b/doc/reports/presentation.pptx
@@ -12,9 +12,6 @@
     <p:sldId id="260" r:id="rId11"/>
     <p:sldId id="261" r:id="rId12"/>
     <p:sldId id="262" r:id="rId13"/>
-    <p:sldId id="263" r:id="rId14"/>
-    <p:sldId id="264" r:id="rId15"/>
-    <p:sldId id="265" r:id="rId16"/>
   </p:sldIdLst>
   <p:sldSz cx="12192000" cy="6858000" type="screen4x3"/>
   <p:notesSz cx="6858000" cy="9144000"/>
@@ -3144,7 +3141,7 @@
 </p:sld>
 </file>
 
-<file path=ppt/slides/slide10.xml><?xml version="1.0" encoding="utf-8"?>
+<file path=ppt/slides/slide2.xml><?xml version="1.0" encoding="utf-8"?>
 <p:sld xmlns:a="http://schemas.openxmlformats.org/drawingml/2006/main" xmlns:p="http://schemas.openxmlformats.org/presentationml/2006/main" xmlns:r="http://schemas.openxmlformats.org/officeDocument/2006/relationships">
   <p:cSld>
     <p:spTree>
@@ -3183,336 +3180,348 @@
                 </a:solidFill>
                 <a:latin typeface="Apple SD Gothic Neo"/>
               </a:rPr>
-              <a:t>판정을 바꾼 게 아니라, · 판단의 근거를 남기고 측정할 수 있게 바꾼 것</a:t>
-            </a:r>
-          </a:p>
-        </p:txBody>
-      </p:sp>
-      <p:sp>
-        <p:nvSpPr>
-          <p:cNvPr id="3" name="TextBox 2"/>
-          <p:cNvSpPr txBox="1"/>
+              <a:t>판정 하나를 바꿨고, 그걸 측정할 수 있게 만들었다</a:t>
+            </a:r>
+          </a:p>
+        </p:txBody>
+      </p:sp>
+      <p:graphicFrame>
+        <p:nvGraphicFramePr>
+          <p:cNvPr id="3" name="Table 2"/>
+          <p:cNvGraphicFramePr>
+            <a:graphicFrameLocks noGrp="1"/>
+          </p:cNvGraphicFramePr>
           <p:nvPr/>
-        </p:nvSpPr>
-        <p:spPr>
-          <a:xfrm>
-            <a:off x="700000" y="1350000"/>
-            <a:ext cx="10500000" cy="500000"/>
-          </a:xfrm>
-          <a:prstGeom prst="rect">
-            <a:avLst/>
-          </a:prstGeom>
-          <a:noFill/>
-        </p:spPr>
-        <p:txBody>
-          <a:bodyPr wrap="square">
-            <a:spAutoFit/>
-          </a:bodyPr>
-          <a:lstStyle/>
-          <a:p>
-            <a:pPr>
-              <a:spcAft>
-                <a:spcPts val="1000"/>
-              </a:spcAft>
-            </a:pPr>
-            <a:r>
-              <a:rPr sz="1600">
-                <a:solidFill>
-                  <a:srgbClr val="16191D"/>
-                </a:solidFill>
-                <a:latin typeface="Apple SD Gothic Neo"/>
-              </a:rPr>
-              <a:t>• curl -s localhost:8100/health → rag 블록 · 12시스템</a:t>
-            </a:r>
-          </a:p>
-        </p:txBody>
-      </p:sp>
-      <p:sp>
-        <p:nvSpPr>
-          <p:cNvPr id="4" name="TextBox 3"/>
-          <p:cNvSpPr txBox="1"/>
-          <p:nvPr/>
-        </p:nvSpPr>
-        <p:spPr>
-          <a:xfrm>
-            <a:off x="700000" y="1870000"/>
-            <a:ext cx="10500000" cy="500000"/>
-          </a:xfrm>
-          <a:prstGeom prst="rect">
-            <a:avLst/>
-          </a:prstGeom>
-          <a:noFill/>
-        </p:spPr>
-        <p:txBody>
-          <a:bodyPr wrap="square">
-            <a:spAutoFit/>
-          </a:bodyPr>
-          <a:lstStyle/>
-          <a:p>
-            <a:pPr>
-              <a:spcAft>
-                <a:spcPts val="1000"/>
-              </a:spcAft>
-            </a:pPr>
-            <a:r>
-              <a:rPr sz="1600">
-                <a:solidFill>
-                  <a:srgbClr val="16191D"/>
-                </a:solidFill>
-                <a:latin typeface="Apple SD Gothic Neo"/>
-              </a:rPr>
-              <a:t>• 채팅: auth-service p95 2.4초 → high-latency</a:t>
-            </a:r>
-          </a:p>
-        </p:txBody>
-      </p:sp>
-      <p:sp>
-        <p:nvSpPr>
-          <p:cNvPr id="5" name="TextBox 4"/>
-          <p:cNvSpPr txBox="1"/>
-          <p:nvPr/>
-        </p:nvSpPr>
-        <p:spPr>
-          <a:xfrm>
-            <a:off x="700000" y="2390000"/>
-            <a:ext cx="10500000" cy="500000"/>
-          </a:xfrm>
-          <a:prstGeom prst="rect">
-            <a:avLst/>
-          </a:prstGeom>
-          <a:noFill/>
-        </p:spPr>
-        <p:txBody>
-          <a:bodyPr wrap="square">
-            <a:spAutoFit/>
-          </a:bodyPr>
-          <a:lstStyle/>
-          <a:p>
-            <a:pPr>
-              <a:spcAft>
-                <a:spcPts val="1000"/>
-              </a:spcAft>
-            </a:pPr>
-            <a:r>
-              <a:rPr sz="1600">
-                <a:solidFill>
-                  <a:srgbClr val="16191D"/>
-                </a:solidFill>
-                <a:latin typeface="Apple SD Gothic Neo"/>
-              </a:rPr>
-              <a:t>• 채팅: search-service 큐 1.2만 건 → queue-backlog (신규 유형)</a:t>
-            </a:r>
-          </a:p>
-        </p:txBody>
-      </p:sp>
-      <p:sp>
-        <p:nvSpPr>
-          <p:cNvPr id="6" name="TextBox 5"/>
-          <p:cNvSpPr txBox="1"/>
-          <p:nvPr/>
-        </p:nvSpPr>
-        <p:spPr>
-          <a:xfrm>
-            <a:off x="700000" y="2910000"/>
-            <a:ext cx="10500000" cy="500000"/>
-          </a:xfrm>
-          <a:prstGeom prst="rect">
-            <a:avLst/>
-          </a:prstGeom>
-          <a:noFill/>
-        </p:spPr>
-        <p:txBody>
-          <a:bodyPr wrap="square">
-            <a:spAutoFit/>
-          </a:bodyPr>
-          <a:lstStyle/>
-          <a:p>
-            <a:pPr>
-              <a:spcAft>
-                <a:spcPts val="1000"/>
-              </a:spcAft>
-            </a:pPr>
-            <a:r>
-              <a:rPr sz="1600">
-                <a:solidFill>
-                  <a:srgbClr val="16191D"/>
-                </a:solidFill>
-                <a:latin typeface="Apple SD Gothic Neo"/>
-              </a:rPr>
-              <a:t>• 채팅: billing-service 장애 → unknown + 폴백</a:t>
-            </a:r>
-          </a:p>
-        </p:txBody>
-      </p:sp>
-    </p:spTree>
-  </p:cSld>
-  <p:clrMapOvr>
-    <a:masterClrMapping/>
-  </p:clrMapOvr>
-</p:sld>
-</file>
-
-<file path=ppt/slides/slide2.xml><?xml version="1.0" encoding="utf-8"?>
-<p:sld xmlns:a="http://schemas.openxmlformats.org/drawingml/2006/main" xmlns:p="http://schemas.openxmlformats.org/presentationml/2006/main" xmlns:r="http://schemas.openxmlformats.org/officeDocument/2006/relationships">
-  <p:cSld>
-    <p:spTree>
-      <p:nvGrpSpPr>
-        <p:cNvPr id="1" name=""/>
-        <p:cNvGrpSpPr/>
-        <p:nvPr/>
-      </p:nvGrpSpPr>
-      <p:grpSpPr/>
-      <p:sp>
-        <p:nvSpPr>
-          <p:cNvPr id="2" name="TextBox 1"/>
-          <p:cNvSpPr txBox="1"/>
-          <p:nvPr/>
-        </p:nvSpPr>
-        <p:spPr>
-          <a:xfrm>
-            <a:off x="600000" y="420000"/>
-            <a:ext cx="11000000" cy="900000"/>
-          </a:xfrm>
-          <a:prstGeom prst="rect">
-            <a:avLst/>
-          </a:prstGeom>
-          <a:noFill/>
-        </p:spPr>
-        <p:txBody>
-          <a:bodyPr wrap="square">
-            <a:spAutoFit/>
-          </a:bodyPr>
-          <a:lstStyle/>
-          <a:p>
-            <a:r>
-              <a:rPr sz="3000" b="1">
-                <a:solidFill>
-                  <a:srgbClr val="16191D"/>
-                </a:solidFill>
-                <a:latin typeface="Apple SD Gothic Neo"/>
-              </a:rPr>
-              <a:t>장애 유형을 고르는 부분이 틀리고 있었다</a:t>
-            </a:r>
-          </a:p>
-        </p:txBody>
-      </p:sp>
-      <p:sp>
-        <p:nvSpPr>
-          <p:cNvPr id="3" name="TextBox 2"/>
-          <p:cNvSpPr txBox="1"/>
-          <p:nvPr/>
-        </p:nvSpPr>
-        <p:spPr>
-          <a:xfrm>
-            <a:off x="700000" y="1350000"/>
-            <a:ext cx="10500000" cy="500000"/>
-          </a:xfrm>
-          <a:prstGeom prst="rect">
-            <a:avLst/>
-          </a:prstGeom>
-          <a:noFill/>
-        </p:spPr>
-        <p:txBody>
-          <a:bodyPr wrap="square">
-            <a:spAutoFit/>
-          </a:bodyPr>
-          <a:lstStyle/>
-          <a:p>
-            <a:pPr>
-              <a:spcAft>
-                <a:spcPts val="1000"/>
-              </a:spcAft>
-            </a:pPr>
-            <a:r>
-              <a:rPr sz="1600">
-                <a:solidFill>
-                  <a:srgbClr val="16191D"/>
-                </a:solidFill>
-                <a:latin typeface="Apple SD Gothic Neo"/>
-              </a:rPr>
-              <a:t>• 규칙 순서가 증상 우선순위와 무관 · CPU가 timeout보다 앞에 있어, 타임아웃 질의가 cpu-spike가 됨</a:t>
-            </a:r>
-          </a:p>
-        </p:txBody>
-      </p:sp>
-      <p:sp>
-        <p:nvSpPr>
-          <p:cNvPr id="4" name="TextBox 3"/>
-          <p:cNvSpPr txBox="1"/>
-          <p:nvPr/>
-        </p:nvSpPr>
-        <p:spPr>
-          <a:xfrm>
-            <a:off x="700000" y="1870000"/>
-            <a:ext cx="10500000" cy="500000"/>
-          </a:xfrm>
-          <a:prstGeom prst="rect">
-            <a:avLst/>
-          </a:prstGeom>
-          <a:noFill/>
-        </p:spPr>
-        <p:txBody>
-          <a:bodyPr wrap="square">
-            <a:spAutoFit/>
-          </a:bodyPr>
-          <a:lstStyle/>
-          <a:p>
-            <a:pPr>
-              <a:spcAft>
-                <a:spcPts val="1000"/>
-              </a:spcAft>
-            </a:pPr>
-            <a:r>
-              <a:rPr sz="1600">
-                <a:solidFill>
-                  <a:srgbClr val="16191D"/>
-                </a:solidFill>
-                <a:latin typeface="Apple SD Gothic Neo"/>
-              </a:rPr>
-              <a:t>• 질의문을 아예 보지 않음 · "디스크 부족" 신고가 지연 알림에 가려 high-latency가 됨</a:t>
-            </a:r>
-          </a:p>
-        </p:txBody>
-      </p:sp>
-      <p:sp>
-        <p:nvSpPr>
-          <p:cNvPr id="5" name="TextBox 4"/>
-          <p:cNvSpPr txBox="1"/>
-          <p:nvPr/>
-        </p:nvSpPr>
-        <p:spPr>
-          <a:xfrm>
-            <a:off x="700000" y="2390000"/>
-            <a:ext cx="10500000" cy="500000"/>
-          </a:xfrm>
-          <a:prstGeom prst="rect">
-            <a:avLst/>
-          </a:prstGeom>
-          <a:noFill/>
-        </p:spPr>
-        <p:txBody>
-          <a:bodyPr wrap="square">
-            <a:spAutoFit/>
-          </a:bodyPr>
-          <a:lstStyle/>
-          <a:p>
-            <a:pPr>
-              <a:spcAft>
-                <a:spcPts val="1000"/>
-              </a:spcAft>
-            </a:pPr>
-            <a:r>
-              <a:rPr sz="1600">
-                <a:solidFill>
-                  <a:srgbClr val="16191D"/>
-                </a:solidFill>
-                <a:latin typeface="Apple SD Gothic Neo"/>
-              </a:rPr>
-              <a:t>• 매칭 실패 시 무조건 db-down · "아무 장애나 db-down 대응을 내놔라"</a:t>
-            </a:r>
-          </a:p>
-        </p:txBody>
-      </p:sp>
+        </p:nvGraphicFramePr>
+        <p:xfrm>
+          <a:off x="600000" y="1350000"/>
+          <a:ext cx="11000000" cy="2100000"/>
+        </p:xfrm>
+        <a:graphic>
+          <a:graphicData uri="http://schemas.openxmlformats.org/drawingml/2006/table">
+            <a:tbl>
+              <a:tblPr firstRow="1" bandRow="1">
+                <a:tableStyleId>{5C22544A-7EE6-4342-B048-85BDC9FD1C3A}</a:tableStyleId>
+              </a:tblPr>
+              <a:tblGrid>
+                <a:gridCol w="3666666"/>
+                <a:gridCol w="3666666"/>
+                <a:gridCol w="3666668"/>
+              </a:tblGrid>
+              <a:tr h="420000">
+                <a:tc>
+                  <a:txBody>
+                    <a:bodyPr/>
+                    <a:lstStyle/>
+                    <a:p>
+                      <a:pPr>
+                        <a:defRPr sz="1200" b="1">
+                          <a:solidFill>
+                            <a:srgbClr val="5B6470"/>
+                          </a:solidFill>
+                          <a:latin typeface="Apple SD Gothic Neo"/>
+                        </a:defRPr>
+                      </a:pPr>
+                      <a:r>
+                        <a:t>축</a:t>
+                      </a:r>
+                    </a:p>
+                  </a:txBody>
+                  <a:tcPr/>
+                </a:tc>
+                <a:tc>
+                  <a:txBody>
+                    <a:bodyPr/>
+                    <a:lstStyle/>
+                    <a:p>
+                      <a:pPr>
+                        <a:defRPr sz="1200" b="1">
+                          <a:solidFill>
+                            <a:srgbClr val="5B6470"/>
+                          </a:solidFill>
+                          <a:latin typeface="Apple SD Gothic Neo"/>
+                        </a:defRPr>
+                      </a:pPr>
+                      <a:r>
+                        <a:t>바꾼 것</a:t>
+                      </a:r>
+                    </a:p>
+                  </a:txBody>
+                  <a:tcPr/>
+                </a:tc>
+                <a:tc>
+                  <a:txBody>
+                    <a:bodyPr/>
+                    <a:lstStyle/>
+                    <a:p>
+                      <a:pPr>
+                        <a:defRPr sz="1200" b="1">
+                          <a:solidFill>
+                            <a:srgbClr val="5B6470"/>
+                          </a:solidFill>
+                          <a:latin typeface="Apple SD Gothic Neo"/>
+                        </a:defRPr>
+                      </a:pPr>
+                      <a:r>
+                        <a:t>결과</a:t>
+                      </a:r>
+                    </a:p>
+                  </a:txBody>
+                  <a:tcPr/>
+                </a:tc>
+              </a:tr>
+              <a:tr h="420000">
+                <a:tc>
+                  <a:txBody>
+                    <a:bodyPr/>
+                    <a:lstStyle/>
+                    <a:p>
+                      <a:pPr>
+                        <a:defRPr sz="1400" b="0">
+                          <a:solidFill>
+                            <a:srgbClr val="16191D"/>
+                          </a:solidFill>
+                          <a:latin typeface="Apple SD Gothic Neo"/>
+                        </a:defRPr>
+                      </a:pPr>
+                      <a:r>
+                        <a:t>1 RAG 판정</a:t>
+                      </a:r>
+                    </a:p>
+                  </a:txBody>
+                  <a:tcPr/>
+                </a:tc>
+                <a:tc>
+                  <a:txBody>
+                    <a:bodyPr/>
+                    <a:lstStyle/>
+                    <a:p>
+                      <a:pPr algn="r">
+                        <a:defRPr sz="1400" b="0">
+                          <a:solidFill>
+                            <a:srgbClr val="16191D"/>
+                          </a:solidFill>
+                          <a:latin typeface="Apple SD Gothic Neo"/>
+                        </a:defRPr>
+                      </a:pPr>
+                      <a:r>
+                        <a:t>키워드 첫 매칭 → 런북 임베딩 의미 검색 (확신 없으면 keyword 폴백)</a:t>
+                      </a:r>
+                    </a:p>
+                  </a:txBody>
+                  <a:tcPr/>
+                </a:tc>
+                <a:tc>
+                  <a:txBody>
+                    <a:bodyPr/>
+                    <a:lstStyle/>
+                    <a:p>
+                      <a:pPr algn="r">
+                        <a:defRPr sz="1400" b="0">
+                          <a:solidFill>
+                            <a:srgbClr val="16191D"/>
+                          </a:solidFill>
+                          <a:latin typeface="Apple SD Gothic Neo"/>
+                        </a:defRPr>
+                      </a:pPr>
+                      <a:r>
+                        <a:t>0.3250 → 0.8500</a:t>
+                      </a:r>
+                    </a:p>
+                  </a:txBody>
+                  <a:tcPr/>
+                </a:tc>
+              </a:tr>
+              <a:tr h="420000">
+                <a:tc>
+                  <a:txBody>
+                    <a:bodyPr/>
+                    <a:lstStyle/>
+                    <a:p>
+                      <a:pPr>
+                        <a:defRPr sz="1400" b="0">
+                          <a:solidFill>
+                            <a:srgbClr val="16191D"/>
+                          </a:solidFill>
+                          <a:latin typeface="Apple SD Gothic Neo"/>
+                        </a:defRPr>
+                      </a:pPr>
+                      <a:r>
+                        <a:t>2 라우팅</a:t>
+                      </a:r>
+                    </a:p>
+                  </a:txBody>
+                  <a:tcPr/>
+                </a:tc>
+                <a:tc>
+                  <a:txBody>
+                    <a:bodyPr/>
+                    <a:lstStyle/>
+                    <a:p>
+                      <a:pPr algn="r">
+                        <a:defRPr sz="1400" b="0">
+                          <a:solidFill>
+                            <a:srgbClr val="16191D"/>
+                          </a:solidFill>
+                          <a:latin typeface="Apple SD Gothic Neo"/>
+                        </a:defRPr>
+                      </a:pPr>
+                      <a:r>
+                        <a:t>결정론 백엔드의 라우팅 정규식이 7개 키워드뿐 → 운영 어휘로 확대</a:t>
+                      </a:r>
+                    </a:p>
+                  </a:txBody>
+                  <a:tcPr/>
+                </a:tc>
+                <a:tc>
+                  <a:txBody>
+                    <a:bodyPr/>
+                    <a:lstStyle/>
+                    <a:p>
+                      <a:pPr algn="r">
+                        <a:defRPr sz="1400" b="0">
+                          <a:solidFill>
+                            <a:srgbClr val="16191D"/>
+                          </a:solidFill>
+                          <a:latin typeface="Apple SD Gothic Neo"/>
+                        </a:defRPr>
+                      </a:pPr>
+                      <a:r>
+                        <a:t>회귀 3/10 → 10/10</a:t>
+                      </a:r>
+                    </a:p>
+                  </a:txBody>
+                  <a:tcPr/>
+                </a:tc>
+              </a:tr>
+              <a:tr h="420000">
+                <a:tc>
+                  <a:txBody>
+                    <a:bodyPr/>
+                    <a:lstStyle/>
+                    <a:p>
+                      <a:pPr>
+                        <a:defRPr sz="1400" b="0">
+                          <a:solidFill>
+                            <a:srgbClr val="16191D"/>
+                          </a:solidFill>
+                          <a:latin typeface="Apple SD Gothic Neo"/>
+                        </a:defRPr>
+                      </a:pPr>
+                      <a:r>
+                        <a:t>3 데이터</a:t>
+                      </a:r>
+                    </a:p>
+                  </a:txBody>
+                  <a:tcPr/>
+                </a:tc>
+                <a:tc>
+                  <a:txBody>
+                    <a:bodyPr/>
+                    <a:lstStyle/>
+                    <a:p>
+                      <a:pPr algn="r">
+                        <a:defRPr sz="1400" b="0">
+                          <a:solidFill>
+                            <a:srgbClr val="16191D"/>
+                          </a:solidFill>
+                          <a:latin typeface="Apple SD Gothic Neo"/>
+                        </a:defRPr>
+                      </a:pPr>
+                      <a:r>
+                        <a:t>모니터링 6→12시스템 · 런북 6→10종 · 파일 선택 한 곳으로 통합</a:t>
+                      </a:r>
+                    </a:p>
+                  </a:txBody>
+                  <a:tcPr/>
+                </a:tc>
+                <a:tc>
+                  <a:txBody>
+                    <a:bodyPr/>
+                    <a:lstStyle/>
+                    <a:p>
+                      <a:pPr algn="r">
+                        <a:defRPr sz="1400" b="0">
+                          <a:solidFill>
+                            <a:srgbClr val="16191D"/>
+                          </a:solidFill>
+                          <a:latin typeface="Apple SD Gothic Neo"/>
+                        </a:defRPr>
+                      </a:pPr>
+                      <a:r>
+                        <a:t>unknown 18.75% → 0%</a:t>
+                      </a:r>
+                    </a:p>
+                  </a:txBody>
+                  <a:tcPr/>
+                </a:tc>
+              </a:tr>
+              <a:tr h="420000">
+                <a:tc>
+                  <a:txBody>
+                    <a:bodyPr/>
+                    <a:lstStyle/>
+                    <a:p>
+                      <a:pPr>
+                        <a:defRPr sz="1400" b="0">
+                          <a:solidFill>
+                            <a:srgbClr val="16191D"/>
+                          </a:solidFill>
+                          <a:latin typeface="Apple SD Gothic Neo"/>
+                        </a:defRPr>
+                      </a:pPr>
+                      <a:r>
+                        <a:t>4 평가</a:t>
+                      </a:r>
+                    </a:p>
+                  </a:txBody>
+                  <a:tcPr/>
+                </a:tc>
+                <a:tc>
+                  <a:txBody>
+                    <a:bodyPr/>
+                    <a:lstStyle/>
+                    <a:p>
+                      <a:pPr algn="r">
+                        <a:defRPr sz="1400" b="0">
+                          <a:solidFill>
+                            <a:srgbClr val="16191D"/>
+                          </a:solidFill>
+                          <a:latin typeface="Apple SD Gothic Neo"/>
+                        </a:defRPr>
+                      </a:pPr>
+                      <a:r>
+                        <a:t>실행 1회 = 폴더 1개 하네스 · 테스트 65개 · 회귀 실행기</a:t>
+                      </a:r>
+                    </a:p>
+                  </a:txBody>
+                  <a:tcPr/>
+                </a:tc>
+                <a:tc>
+                  <a:txBody>
+                    <a:bodyPr/>
+                    <a:lstStyle/>
+                    <a:p>
+                      <a:pPr algn="r">
+                        <a:defRPr sz="1400" b="0">
+                          <a:solidFill>
+                            <a:srgbClr val="16191D"/>
+                          </a:solidFill>
+                          <a:latin typeface="Apple SD Gothic Neo"/>
+                        </a:defRPr>
+                      </a:pPr>
+                      <a:r>
+                        <a:t>재현성 identical</a:t>
+                      </a:r>
+                    </a:p>
+                  </a:txBody>
+                  <a:tcPr/>
+                </a:tc>
+              </a:tr>
+            </a:tbl>
+          </a:graphicData>
+        </a:graphic>
+      </p:graphicFrame>
     </p:spTree>
   </p:cSld>
   <p:clrMapOvr>
@@ -3560,1073 +3569,7 @@
                 </a:solidFill>
                 <a:latin typeface="Apple SD Gothic Neo"/>
               </a:rPr>
-              <a:t>먼저 고쳐 볼 자리를 찾았다</a:t>
-            </a:r>
-          </a:p>
-        </p:txBody>
-      </p:sp>
-      <p:sp>
-        <p:nvSpPr>
-          <p:cNvPr id="3" name="TextBox 2"/>
-          <p:cNvSpPr txBox="1"/>
-          <p:nvPr/>
-        </p:nvSpPr>
-        <p:spPr>
-          <a:xfrm>
-            <a:off x="700000" y="1350000"/>
-            <a:ext cx="10500000" cy="500000"/>
-          </a:xfrm>
-          <a:prstGeom prst="rect">
-            <a:avLst/>
-          </a:prstGeom>
-          <a:noFill/>
-        </p:spPr>
-        <p:txBody>
-          <a:bodyPr wrap="square">
-            <a:spAutoFit/>
-          </a:bodyPr>
-          <a:lstStyle/>
-          <a:p>
-            <a:pPr>
-              <a:spcAft>
-                <a:spcPts val="1000"/>
-              </a:spcAft>
-            </a:pPr>
-            <a:r>
-              <a:rPr sz="1600">
-                <a:solidFill>
-                  <a:srgbClr val="16191D"/>
-                </a:solidFill>
-                <a:latin typeface="Apple SD Gothic Neo"/>
-              </a:rPr>
-              <a:t>• B07 — gateway(타임아웃) + payments(CPU)를 함께 조회하면 CPU가 먼저 잡힘</a:t>
-            </a:r>
-          </a:p>
-        </p:txBody>
-      </p:sp>
-      <p:sp>
-        <p:nvSpPr>
-          <p:cNvPr id="4" name="TextBox 3"/>
-          <p:cNvSpPr txBox="1"/>
-          <p:nvPr/>
-        </p:nvSpPr>
-        <p:spPr>
-          <a:xfrm>
-            <a:off x="700000" y="1870000"/>
-            <a:ext cx="10500000" cy="500000"/>
-          </a:xfrm>
-          <a:prstGeom prst="rect">
-            <a:avLst/>
-          </a:prstGeom>
-          <a:noFill/>
-        </p:spPr>
-        <p:txBody>
-          <a:bodyPr wrap="square">
-            <a:spAutoFit/>
-          </a:bodyPr>
-          <a:lstStyle/>
-          <a:p>
-            <a:pPr>
-              <a:spcAft>
-                <a:spcPts val="1000"/>
-              </a:spcAft>
-            </a:pPr>
-            <a:r>
-              <a:rPr sz="1600">
-                <a:solidFill>
-                  <a:srgbClr val="16191D"/>
-                </a:solidFill>
-                <a:latin typeface="Apple SD Gothic Neo"/>
-              </a:rPr>
-              <a:t>• B09 — memory 규칙이 disk 규칙보다 앞에 있음</a:t>
-            </a:r>
-          </a:p>
-        </p:txBody>
-      </p:sp>
-      <p:sp>
-        <p:nvSpPr>
-          <p:cNvPr id="5" name="TextBox 4"/>
-          <p:cNvSpPr txBox="1"/>
-          <p:nvPr/>
-        </p:nvSpPr>
-        <p:spPr>
-          <a:xfrm>
-            <a:off x="700000" y="2390000"/>
-            <a:ext cx="10500000" cy="500000"/>
-          </a:xfrm>
-          <a:prstGeom prst="rect">
-            <a:avLst/>
-          </a:prstGeom>
-          <a:noFill/>
-        </p:spPr>
-        <p:txBody>
-          <a:bodyPr wrap="square">
-            <a:spAutoFit/>
-          </a:bodyPr>
-          <a:lstStyle/>
-          <a:p>
-            <a:pPr>
-              <a:spcAft>
-                <a:spcPts val="1000"/>
-              </a:spcAft>
-            </a:pPr>
-            <a:r>
-              <a:rPr sz="1600">
-                <a:solidFill>
-                  <a:srgbClr val="16191D"/>
-                </a:solidFill>
-                <a:latin typeface="Apple SD Gothic Neo"/>
-              </a:rPr>
-              <a:t>• B10·B11 — 질의 텍스트를 읽지 않아서 생긴 오분류</a:t>
-            </a:r>
-          </a:p>
-        </p:txBody>
-      </p:sp>
-      <p:sp>
-        <p:nvSpPr>
-          <p:cNvPr id="6" name="TextBox 5"/>
-          <p:cNvSpPr txBox="1"/>
-          <p:nvPr/>
-        </p:nvSpPr>
-        <p:spPr>
-          <a:xfrm>
-            <a:off x="700000" y="2910000"/>
-            <a:ext cx="10500000" cy="500000"/>
-          </a:xfrm>
-          <a:prstGeom prst="rect">
-            <a:avLst/>
-          </a:prstGeom>
-          <a:noFill/>
-        </p:spPr>
-        <p:txBody>
-          <a:bodyPr wrap="square">
-            <a:spAutoFit/>
-          </a:bodyPr>
-          <a:lstStyle/>
-          <a:p>
-            <a:pPr>
-              <a:spcAft>
-                <a:spcPts val="1000"/>
-              </a:spcAft>
-            </a:pPr>
-            <a:r>
-              <a:rPr sz="1600">
-                <a:solidFill>
-                  <a:srgbClr val="16191D"/>
-                </a:solidFill>
-                <a:latin typeface="Apple SD Gothic Neo"/>
-              </a:rPr>
-              <a:t>• 라우팅 공백 — PDF 9쪽 예시 질의 10개를 돌리니 7개가 chat으로 떨어졌다 · 결정론 백엔드의 라우팅 정규식이 7개 키워드뿐이었다 → 3/10 → 수정 후 10/10</a:t>
-            </a:r>
-          </a:p>
-        </p:txBody>
-      </p:sp>
-    </p:spTree>
-  </p:cSld>
-  <p:clrMapOvr>
-    <a:masterClrMapping/>
-  </p:clrMapOvr>
-</p:sld>
-</file>
-
-<file path=ppt/slides/slide4.xml><?xml version="1.0" encoding="utf-8"?>
-<p:sld xmlns:a="http://schemas.openxmlformats.org/drawingml/2006/main" xmlns:p="http://schemas.openxmlformats.org/presentationml/2006/main" xmlns:r="http://schemas.openxmlformats.org/officeDocument/2006/relationships">
-  <p:cSld>
-    <p:spTree>
-      <p:nvGrpSpPr>
-        <p:cNvPr id="1" name=""/>
-        <p:cNvGrpSpPr/>
-        <p:nvPr/>
-      </p:nvGrpSpPr>
-      <p:grpSpPr/>
-      <p:sp>
-        <p:nvSpPr>
-          <p:cNvPr id="2" name="TextBox 1"/>
-          <p:cNvSpPr txBox="1"/>
-          <p:nvPr/>
-        </p:nvSpPr>
-        <p:spPr>
-          <a:xfrm>
-            <a:off x="600000" y="420000"/>
-            <a:ext cx="11000000" cy="900000"/>
-          </a:xfrm>
-          <a:prstGeom prst="rect">
-            <a:avLst/>
-          </a:prstGeom>
-          <a:noFill/>
-        </p:spPr>
-        <p:txBody>
-          <a:bodyPr wrap="square">
-            <a:spAutoFit/>
-          </a:bodyPr>
-          <a:lstStyle/>
-          <a:p>
-            <a:r>
-              <a:rPr sz="3000" b="1">
-                <a:solidFill>
-                  <a:srgbClr val="16191D"/>
-                </a:solidFill>
-                <a:latin typeface="Apple SD Gothic Neo"/>
-              </a:rPr>
-              <a:t>RunBook 선택을 키워드 규칙 → 임베딩 의미 검색으로</a:t>
-            </a:r>
-          </a:p>
-        </p:txBody>
-      </p:sp>
-      <p:sp>
-        <p:nvSpPr>
-          <p:cNvPr id="3" name="TextBox 2"/>
-          <p:cNvSpPr txBox="1"/>
-          <p:nvPr/>
-        </p:nvSpPr>
-        <p:spPr>
-          <a:xfrm>
-            <a:off x="700000" y="1350000"/>
-            <a:ext cx="10500000" cy="500000"/>
-          </a:xfrm>
-          <a:prstGeom prst="rect">
-            <a:avLst/>
-          </a:prstGeom>
-          <a:noFill/>
-        </p:spPr>
-        <p:txBody>
-          <a:bodyPr wrap="square">
-            <a:spAutoFit/>
-          </a:bodyPr>
-          <a:lstStyle/>
-          <a:p>
-            <a:pPr>
-              <a:spcAft>
-                <a:spcPts val="1000"/>
-              </a:spcAft>
-            </a:pPr>
-            <a:r>
-              <a:rPr sz="1600">
-                <a:solidFill>
-                  <a:srgbClr val="16191D"/>
-                </a:solidFill>
-                <a:latin typeface="Apple SD Gothic Neo"/>
-              </a:rPr>
-              <a:t>• disabled / index_unavailable</a:t>
-            </a:r>
-          </a:p>
-        </p:txBody>
-      </p:sp>
-      <p:sp>
-        <p:nvSpPr>
-          <p:cNvPr id="4" name="TextBox 3"/>
-          <p:cNvSpPr txBox="1"/>
-          <p:nvPr/>
-        </p:nvSpPr>
-        <p:spPr>
-          <a:xfrm>
-            <a:off x="700000" y="1870000"/>
-            <a:ext cx="10500000" cy="500000"/>
-          </a:xfrm>
-          <a:prstGeom prst="rect">
-            <a:avLst/>
-          </a:prstGeom>
-          <a:noFill/>
-        </p:spPr>
-        <p:txBody>
-          <a:bodyPr wrap="square">
-            <a:spAutoFit/>
-          </a:bodyPr>
-          <a:lstStyle/>
-          <a:p>
-            <a:pPr>
-              <a:spcAft>
-                <a:spcPts val="1000"/>
-              </a:spcAft>
-            </a:pPr>
-            <a:r>
-              <a:rPr sz="1600">
-                <a:solidFill>
-                  <a:srgbClr val="16191D"/>
-                </a:solidFill>
-                <a:latin typeface="Apple SD Gothic Neo"/>
-              </a:rPr>
-              <a:t>• embed_failed</a:t>
-            </a:r>
-          </a:p>
-        </p:txBody>
-      </p:sp>
-      <p:sp>
-        <p:nvSpPr>
-          <p:cNvPr id="5" name="TextBox 4"/>
-          <p:cNvSpPr txBox="1"/>
-          <p:nvPr/>
-        </p:nvSpPr>
-        <p:spPr>
-          <a:xfrm>
-            <a:off x="700000" y="2390000"/>
-            <a:ext cx="10500000" cy="500000"/>
-          </a:xfrm>
-          <a:prstGeom prst="rect">
-            <a:avLst/>
-          </a:prstGeom>
-          <a:noFill/>
-        </p:spPr>
-        <p:txBody>
-          <a:bodyPr wrap="square">
-            <a:spAutoFit/>
-          </a:bodyPr>
-          <a:lstStyle/>
-          <a:p>
-            <a:pPr>
-              <a:spcAft>
-                <a:spcPts val="1000"/>
-              </a:spcAft>
-            </a:pPr>
-            <a:r>
-              <a:rPr sz="1600">
-                <a:solidFill>
-                  <a:srgbClr val="16191D"/>
-                </a:solidFill>
-                <a:latin typeface="Apple SD Gothic Neo"/>
-              </a:rPr>
-              <a:t>• low_score / low_margin</a:t>
-            </a:r>
-          </a:p>
-        </p:txBody>
-      </p:sp>
-      <p:sp>
-        <p:nvSpPr>
-          <p:cNvPr id="6" name="TextBox 5"/>
-          <p:cNvSpPr txBox="1"/>
-          <p:nvPr/>
-        </p:nvSpPr>
-        <p:spPr>
-          <a:xfrm>
-            <a:off x="700000" y="2910000"/>
-            <a:ext cx="10500000" cy="500000"/>
-          </a:xfrm>
-          <a:prstGeom prst="rect">
-            <a:avLst/>
-          </a:prstGeom>
-          <a:noFill/>
-        </p:spPr>
-        <p:txBody>
-          <a:bodyPr wrap="square">
-            <a:spAutoFit/>
-          </a:bodyPr>
-          <a:lstStyle/>
-          <a:p>
-            <a:pPr>
-              <a:spcAft>
-                <a:spcPts val="1000"/>
-              </a:spcAft>
-            </a:pPr>
-            <a:r>
-              <a:rPr sz="1600">
-                <a:solidFill>
-                  <a:srgbClr val="16191D"/>
-                </a:solidFill>
-                <a:latin typeface="Apple SD Gothic Neo"/>
-              </a:rPr>
-              <a:t>• 그 외 → RAG 판정</a:t>
-            </a:r>
-          </a:p>
-        </p:txBody>
-      </p:sp>
-      <p:sp>
-        <p:nvSpPr>
-          <p:cNvPr id="7" name="TextBox 6"/>
-          <p:cNvSpPr txBox="1"/>
-          <p:nvPr/>
-        </p:nvSpPr>
-        <p:spPr>
-          <a:xfrm>
-            <a:off x="700000" y="3430000"/>
-            <a:ext cx="10500000" cy="500000"/>
-          </a:xfrm>
-          <a:prstGeom prst="rect">
-            <a:avLst/>
-          </a:prstGeom>
-          <a:noFill/>
-        </p:spPr>
-        <p:txBody>
-          <a:bodyPr wrap="square">
-            <a:spAutoFit/>
-          </a:bodyPr>
-          <a:lstStyle/>
-          <a:p>
-            <a:pPr>
-              <a:spcAft>
-                <a:spcPts val="1000"/>
-              </a:spcAft>
-            </a:pPr>
-            <a:r>
-              <a:rPr sz="1600">
-                <a:solidFill>
-                  <a:srgbClr val="16191D"/>
-                </a:solidFill>
-                <a:latin typeface="Apple SD Gothic Neo"/>
-              </a:rPr>
-              <a:t>• agent/rag/embedder.py — Ollama qwen3-embedding:0.6b (1024차원)</a:t>
-            </a:r>
-          </a:p>
-        </p:txBody>
-      </p:sp>
-      <p:sp>
-        <p:nvSpPr>
-          <p:cNvPr id="8" name="TextBox 7"/>
-          <p:cNvSpPr txBox="1"/>
-          <p:nvPr/>
-        </p:nvSpPr>
-        <p:spPr>
-          <a:xfrm>
-            <a:off x="700000" y="3950000"/>
-            <a:ext cx="10500000" cy="500000"/>
-          </a:xfrm>
-          <a:prstGeom prst="rect">
-            <a:avLst/>
-          </a:prstGeom>
-          <a:noFill/>
-        </p:spPr>
-        <p:txBody>
-          <a:bodyPr wrap="square">
-            <a:spAutoFit/>
-          </a:bodyPr>
-          <a:lstStyle/>
-          <a:p>
-            <a:pPr>
-              <a:spcAft>
-                <a:spcPts val="1000"/>
-              </a:spcAft>
-            </a:pPr>
-            <a:r>
-              <a:rPr sz="1600">
-                <a:solidFill>
-                  <a:srgbClr val="16191D"/>
-                </a:solidFill>
-                <a:latin typeface="Apple SD Gothic Neo"/>
-              </a:rPr>
-              <a:t>• agent/rag/index.py — 10문서 인덱스 + JSON 캐시, index_sha256 기록</a:t>
-            </a:r>
-          </a:p>
-        </p:txBody>
-      </p:sp>
-      <p:sp>
-        <p:nvSpPr>
-          <p:cNvPr id="9" name="TextBox 8"/>
-          <p:cNvSpPr txBox="1"/>
-          <p:nvPr/>
-        </p:nvSpPr>
-        <p:spPr>
-          <a:xfrm>
-            <a:off x="700000" y="4470000"/>
-            <a:ext cx="10500000" cy="500000"/>
-          </a:xfrm>
-          <a:prstGeom prst="rect">
-            <a:avLst/>
-          </a:prstGeom>
-          <a:noFill/>
-        </p:spPr>
-        <p:txBody>
-          <a:bodyPr wrap="square">
-            <a:spAutoFit/>
-          </a:bodyPr>
-          <a:lstStyle/>
-          <a:p>
-            <a:pPr>
-              <a:spcAft>
-                <a:spcPts val="1000"/>
-              </a:spcAft>
-            </a:pPr>
-            <a:r>
-              <a:rPr sz="1600">
-                <a:solidFill>
-                  <a:srgbClr val="16191D"/>
-                </a:solidFill>
-                <a:latin typeface="Apple SD Gothic Neo"/>
-              </a:rPr>
-              <a:t>• agent/rag/classifier.py — 5분기 판정 + 폴백</a:t>
-            </a:r>
-          </a:p>
-        </p:txBody>
-      </p:sp>
-      <p:sp>
-        <p:nvSpPr>
-          <p:cNvPr id="10" name="TextBox 9"/>
-          <p:cNvSpPr txBox="1"/>
-          <p:nvPr/>
-        </p:nvSpPr>
-        <p:spPr>
-          <a:xfrm>
-            <a:off x="700000" y="4990000"/>
-            <a:ext cx="10500000" cy="500000"/>
-          </a:xfrm>
-          <a:prstGeom prst="rect">
-            <a:avLst/>
-          </a:prstGeom>
-          <a:noFill/>
-        </p:spPr>
-        <p:txBody>
-          <a:bodyPr wrap="square">
-            <a:spAutoFit/>
-          </a:bodyPr>
-          <a:lstStyle/>
-          <a:p>
-            <a:pPr>
-              <a:spcAft>
-                <a:spcPts val="1000"/>
-              </a:spcAft>
-            </a:pPr>
-            <a:r>
-              <a:rPr sz="1600">
-                <a:solidFill>
-                  <a:srgbClr val="16191D"/>
-                </a:solidFill>
-                <a:latin typeface="Apple SD Gothic Neo"/>
-              </a:rPr>
-              <a:t>• agent/graph.py::_select_incident_type() → replan_check_node</a:t>
-            </a:r>
-          </a:p>
-        </p:txBody>
-      </p:sp>
-      <p:sp>
-        <p:nvSpPr>
-          <p:cNvPr id="11" name="TextBox 10"/>
-          <p:cNvSpPr txBox="1"/>
-          <p:nvPr/>
-        </p:nvSpPr>
-        <p:spPr>
-          <a:xfrm>
-            <a:off x="700000" y="5510000"/>
-            <a:ext cx="10500000" cy="500000"/>
-          </a:xfrm>
-          <a:prstGeom prst="rect">
-            <a:avLst/>
-          </a:prstGeom>
-          <a:noFill/>
-        </p:spPr>
-        <p:txBody>
-          <a:bodyPr wrap="square">
-            <a:spAutoFit/>
-          </a:bodyPr>
-          <a:lstStyle/>
-          <a:p>
-            <a:pPr>
-              <a:spcAft>
-                <a:spcPts val="1000"/>
-              </a:spcAft>
-            </a:pPr>
-            <a:r>
-              <a:rPr sz="1600">
-                <a:solidFill>
-                  <a:srgbClr val="16191D"/>
-                </a:solidFill>
-                <a:latin typeface="Apple SD Gothic Neo"/>
-              </a:rPr>
-              <a:t>• 근거 노출: /health.rag, /chat metadata, SSE ReplanCheck</a:t>
-            </a:r>
-          </a:p>
-        </p:txBody>
-      </p:sp>
-    </p:spTree>
-  </p:cSld>
-  <p:clrMapOvr>
-    <a:masterClrMapping/>
-  </p:clrMapOvr>
-</p:sld>
-</file>
-
-<file path=ppt/slides/slide5.xml><?xml version="1.0" encoding="utf-8"?>
-<p:sld xmlns:a="http://schemas.openxmlformats.org/drawingml/2006/main" xmlns:p="http://schemas.openxmlformats.org/presentationml/2006/main" xmlns:r="http://schemas.openxmlformats.org/officeDocument/2006/relationships">
-  <p:cSld>
-    <p:spTree>
-      <p:nvGrpSpPr>
-        <p:cNvPr id="1" name=""/>
-        <p:cNvGrpSpPr/>
-        <p:nvPr/>
-      </p:nvGrpSpPr>
-      <p:grpSpPr/>
-      <p:sp>
-        <p:nvSpPr>
-          <p:cNvPr id="2" name="TextBox 1"/>
-          <p:cNvSpPr txBox="1"/>
-          <p:nvPr/>
-        </p:nvSpPr>
-        <p:spPr>
-          <a:xfrm>
-            <a:off x="600000" y="420000"/>
-            <a:ext cx="11000000" cy="900000"/>
-          </a:xfrm>
-          <a:prstGeom prst="rect">
-            <a:avLst/>
-          </a:prstGeom>
-          <a:noFill/>
-        </p:spPr>
-        <p:txBody>
-          <a:bodyPr wrap="square">
-            <a:spAutoFit/>
-          </a:bodyPr>
-          <a:lstStyle/>
-          <a:p>
-            <a:r>
-              <a:rPr sz="3000" b="1">
-                <a:solidFill>
-                  <a:srgbClr val="16191D"/>
-                </a:solidFill>
-                <a:latin typeface="Apple SD Gothic Neo"/>
-              </a:rPr>
-              <a:t>데이터 확장 — 시스템 6→12, 런북 6→10</a:t>
-            </a:r>
-          </a:p>
-        </p:txBody>
-      </p:sp>
-      <p:sp>
-        <p:nvSpPr>
-          <p:cNvPr id="3" name="TextBox 2"/>
-          <p:cNvSpPr txBox="1"/>
-          <p:nvPr/>
-        </p:nvSpPr>
-        <p:spPr>
-          <a:xfrm>
-            <a:off x="700000" y="1350000"/>
-            <a:ext cx="10500000" cy="500000"/>
-          </a:xfrm>
-          <a:prstGeom prst="rect">
-            <a:avLst/>
-          </a:prstGeom>
-          <a:noFill/>
-        </p:spPr>
-        <p:txBody>
-          <a:bodyPr wrap="square">
-            <a:spAutoFit/>
-          </a:bodyPr>
-          <a:lstStyle/>
-          <a:p>
-            <a:pPr>
-              <a:spcAft>
-                <a:spcPts val="1000"/>
-              </a:spcAft>
-            </a:pPr>
-            <a:r>
-              <a:rPr sz="1600">
-                <a:solidFill>
-                  <a:srgbClr val="16191D"/>
-                </a:solidFill>
-                <a:latin typeface="Apple SD Gothic Neo"/>
-              </a:rPr>
-              <a:t>• 신규 시스템 6개 — search·notify·session·media·inventory·report-service</a:t>
-            </a:r>
-          </a:p>
-        </p:txBody>
-      </p:sp>
-      <p:sp>
-        <p:nvSpPr>
-          <p:cNvPr id="4" name="TextBox 3"/>
-          <p:cNvSpPr txBox="1"/>
-          <p:nvPr/>
-        </p:nvSpPr>
-        <p:spPr>
-          <a:xfrm>
-            <a:off x="700000" y="1870000"/>
-            <a:ext cx="10500000" cy="500000"/>
-          </a:xfrm>
-          <a:prstGeom prst="rect">
-            <a:avLst/>
-          </a:prstGeom>
-          <a:noFill/>
-        </p:spPr>
-        <p:txBody>
-          <a:bodyPr wrap="square">
-            <a:spAutoFit/>
-          </a:bodyPr>
-          <a:lstStyle/>
-          <a:p>
-            <a:pPr>
-              <a:spcAft>
-                <a:spcPts val="1000"/>
-              </a:spcAft>
-            </a:pPr>
-            <a:r>
-              <a:rPr sz="1600">
-                <a:solidFill>
-                  <a:srgbClr val="16191D"/>
-                </a:solidFill>
-                <a:latin typeface="Apple SD Gothic Neo"/>
-              </a:rPr>
-              <a:t>• 신규 런북 4개 — queue-backlog , cert-expiry , connection-pool , replication-lag</a:t>
-            </a:r>
-          </a:p>
-        </p:txBody>
-      </p:sp>
-      <p:sp>
-        <p:nvSpPr>
-          <p:cNvPr id="5" name="TextBox 4"/>
-          <p:cNvSpPr txBox="1"/>
-          <p:nvPr/>
-        </p:nvSpPr>
-        <p:spPr>
-          <a:xfrm>
-            <a:off x="700000" y="2390000"/>
-            <a:ext cx="10500000" cy="500000"/>
-          </a:xfrm>
-          <a:prstGeom prst="rect">
-            <a:avLst/>
-          </a:prstGeom>
-          <a:noFill/>
-        </p:spPr>
-        <p:txBody>
-          <a:bodyPr wrap="square">
-            <a:spAutoFit/>
-          </a:bodyPr>
-          <a:lstStyle/>
-          <a:p>
-            <a:pPr>
-              <a:spcAft>
-                <a:spcPts val="1000"/>
-              </a:spcAft>
-            </a:pPr>
-            <a:r>
-              <a:rPr sz="1600">
-                <a:solidFill>
-                  <a:srgbClr val="16191D"/>
-                </a:solidFill>
-                <a:latin typeface="Apple SD Gothic Neo"/>
-              </a:rPr>
-              <a:t>• DATA_PROFILE=base|extended — 결정 지점은 agent/data_profile.py 한 곳</a:t>
-            </a:r>
-          </a:p>
-        </p:txBody>
-      </p:sp>
-      <p:sp>
-        <p:nvSpPr>
-          <p:cNvPr id="6" name="TextBox 5"/>
-          <p:cNvSpPr txBox="1"/>
-          <p:nvPr/>
-        </p:nvSpPr>
-        <p:spPr>
-          <a:xfrm>
-            <a:off x="700000" y="2910000"/>
-            <a:ext cx="10500000" cy="500000"/>
-          </a:xfrm>
-          <a:prstGeom prst="rect">
-            <a:avLst/>
-          </a:prstGeom>
-          <a:noFill/>
-        </p:spPr>
-        <p:txBody>
-          <a:bodyPr wrap="square">
-            <a:spAutoFit/>
-          </a:bodyPr>
-          <a:lstStyle/>
-          <a:p>
-            <a:pPr>
-              <a:spcAft>
-                <a:spcPts val="1000"/>
-              </a:spcAft>
-            </a:pPr>
-            <a:r>
-              <a:rPr sz="1600">
-                <a:solidFill>
-                  <a:srgbClr val="16191D"/>
-                </a:solidFill>
-                <a:latin typeface="Apple SD Gothic Neo"/>
-              </a:rPr>
-              <a:t>• 기존 monitoring.json은 덮어쓰지 않고 기준선으로 보존</a:t>
-            </a:r>
-          </a:p>
-        </p:txBody>
-      </p:sp>
-      <p:sp>
-        <p:nvSpPr>
-          <p:cNvPr id="7" name="TextBox 6"/>
-          <p:cNvSpPr txBox="1"/>
-          <p:nvPr/>
-        </p:nvSpPr>
-        <p:spPr>
-          <a:xfrm>
-            <a:off x="700000" y="3430000"/>
-            <a:ext cx="10500000" cy="500000"/>
-          </a:xfrm>
-          <a:prstGeom prst="rect">
-            <a:avLst/>
-          </a:prstGeom>
-          <a:noFill/>
-        </p:spPr>
-        <p:txBody>
-          <a:bodyPr wrap="square">
-            <a:spAutoFit/>
-          </a:bodyPr>
-          <a:lstStyle/>
-          <a:p>
-            <a:pPr>
-              <a:spcAft>
-                <a:spcPts val="1000"/>
-              </a:spcAft>
-            </a:pPr>
-            <a:r>
-              <a:rPr sz="1600">
-                <a:solidFill>
-                  <a:srgbClr val="16191D"/>
-                </a:solidFill>
-                <a:latin typeface="Apple SD Gothic Neo"/>
-              </a:rPr>
-              <a:t>• billing-service는 일부러 제외 — 미지 시스템 처리 회귀 검증용</a:t>
-            </a:r>
-          </a:p>
-        </p:txBody>
-      </p:sp>
-    </p:spTree>
-  </p:cSld>
-  <p:clrMapOvr>
-    <a:masterClrMapping/>
-  </p:clrMapOvr>
-</p:sld>
-</file>
-
-<file path=ppt/slides/slide6.xml><?xml version="1.0" encoding="utf-8"?>
-<p:sld xmlns:a="http://schemas.openxmlformats.org/drawingml/2006/main" xmlns:p="http://schemas.openxmlformats.org/presentationml/2006/main" xmlns:r="http://schemas.openxmlformats.org/officeDocument/2006/relationships">
-  <p:cSld>
-    <p:spTree>
-      <p:nvGrpSpPr>
-        <p:cNvPr id="1" name=""/>
-        <p:cNvGrpSpPr/>
-        <p:nvPr/>
-      </p:nvGrpSpPr>
-      <p:grpSpPr/>
-      <p:sp>
-        <p:nvSpPr>
-          <p:cNvPr id="2" name="TextBox 1"/>
-          <p:cNvSpPr txBox="1"/>
-          <p:nvPr/>
-        </p:nvSpPr>
-        <p:spPr>
-          <a:xfrm>
-            <a:off x="600000" y="420000"/>
-            <a:ext cx="11000000" cy="900000"/>
-          </a:xfrm>
-          <a:prstGeom prst="rect">
-            <a:avLst/>
-          </a:prstGeom>
-          <a:noFill/>
-        </p:spPr>
-        <p:txBody>
-          <a:bodyPr wrap="square">
-            <a:spAutoFit/>
-          </a:bodyPr>
-          <a:lstStyle/>
-          <a:p>
-            <a:r>
-              <a:rPr sz="3000" b="1">
-                <a:solidFill>
-                  <a:srgbClr val="16191D"/>
-                </a:solidFill>
-                <a:latin typeface="Apple SD Gothic Neo"/>
-              </a:rPr>
-              <a:t>평가 하네스 — 실행 1회 = 폴더 1개</a:t>
-            </a:r>
-          </a:p>
-        </p:txBody>
-      </p:sp>
-      <p:sp>
-        <p:nvSpPr>
-          <p:cNvPr id="3" name="TextBox 2"/>
-          <p:cNvSpPr txBox="1"/>
-          <p:nvPr/>
-        </p:nvSpPr>
-        <p:spPr>
-          <a:xfrm>
-            <a:off x="700000" y="1350000"/>
-            <a:ext cx="10500000" cy="500000"/>
-          </a:xfrm>
-          <a:prstGeom prst="rect">
-            <a:avLst/>
-          </a:prstGeom>
-          <a:noFill/>
-        </p:spPr>
-        <p:txBody>
-          <a:bodyPr wrap="square">
-            <a:spAutoFit/>
-          </a:bodyPr>
-          <a:lstStyle/>
-          <a:p>
-            <a:pPr>
-              <a:spcAft>
-                <a:spcPts val="1000"/>
-              </a:spcAft>
-            </a:pPr>
-            <a:r>
-              <a:rPr sz="1600">
-                <a:solidFill>
-                  <a:srgbClr val="16191D"/>
-                </a:solidFill>
-                <a:latin typeface="Apple SD Gothic Neo"/>
-              </a:rPr>
-              <a:t>• eval/run_eval.py — 실행 1회 = artifacts/runs// · manifest.json(조건·해시·git) · metrics.json · requests/responses jsonl</a:t>
-            </a:r>
-          </a:p>
-        </p:txBody>
-      </p:sp>
-      <p:sp>
-        <p:nvSpPr>
-          <p:cNvPr id="4" name="TextBox 3"/>
-          <p:cNvSpPr txBox="1"/>
-          <p:nvPr/>
-        </p:nvSpPr>
-        <p:spPr>
-          <a:xfrm>
-            <a:off x="700000" y="1870000"/>
-            <a:ext cx="10500000" cy="500000"/>
-          </a:xfrm>
-          <a:prstGeom prst="rect">
-            <a:avLst/>
-          </a:prstGeom>
-          <a:noFill/>
-        </p:spPr>
-        <p:txBody>
-          <a:bodyPr wrap="square">
-            <a:spAutoFit/>
-          </a:bodyPr>
-          <a:lstStyle/>
-          <a:p>
-            <a:pPr>
-              <a:spcAft>
-                <a:spcPts val="1000"/>
-              </a:spcAft>
-            </a:pPr>
-            <a:r>
-              <a:rPr sz="1600">
-                <a:solidFill>
-                  <a:srgbClr val="16191D"/>
-                </a:solidFill>
-                <a:latin typeface="Apple SD Gothic Neo"/>
-              </a:rPr>
-              <a:t>• eval/metrics.py — accuracy · macro-F1 · 혼동행렬 · 지연 percentile</a:t>
-            </a:r>
-          </a:p>
-        </p:txBody>
-      </p:sp>
-      <p:sp>
-        <p:nvSpPr>
-          <p:cNvPr id="5" name="TextBox 4"/>
-          <p:cNvSpPr txBox="1"/>
-          <p:nvPr/>
-        </p:nvSpPr>
-        <p:spPr>
-          <a:xfrm>
-            <a:off x="700000" y="2390000"/>
-            <a:ext cx="10500000" cy="500000"/>
-          </a:xfrm>
-          <a:prstGeom prst="rect">
-            <a:avLst/>
-          </a:prstGeom>
-          <a:noFill/>
-        </p:spPr>
-        <p:txBody>
-          <a:bodyPr wrap="square">
-            <a:spAutoFit/>
-          </a:bodyPr>
-          <a:lstStyle/>
-          <a:p>
-            <a:pPr>
-              <a:spcAft>
-                <a:spcPts val="1000"/>
-              </a:spcAft>
-            </a:pPr>
-            <a:r>
-              <a:rPr sz="1600">
-                <a:solidFill>
-                  <a:srgbClr val="16191D"/>
-                </a:solidFill>
-                <a:latin typeface="Apple SD Gothic Neo"/>
-              </a:rPr>
-              <a:t>• eval/labels_extended.json — 40문항(10유형 × 4카테고리), 측정 전 동결</a:t>
-            </a:r>
-          </a:p>
-        </p:txBody>
-      </p:sp>
-      <p:sp>
-        <p:nvSpPr>
-          <p:cNvPr id="6" name="TextBox 5"/>
-          <p:cNvSpPr txBox="1"/>
-          <p:nvPr/>
-        </p:nvSpPr>
-        <p:spPr>
-          <a:xfrm>
-            <a:off x="700000" y="2910000"/>
-            <a:ext cx="10500000" cy="500000"/>
-          </a:xfrm>
-          <a:prstGeom prst="rect">
-            <a:avLst/>
-          </a:prstGeom>
-          <a:noFill/>
-        </p:spPr>
-        <p:txBody>
-          <a:bodyPr wrap="square">
-            <a:spAutoFit/>
-          </a:bodyPr>
-          <a:lstStyle/>
-          <a:p>
-            <a:pPr>
-              <a:spcAft>
-                <a:spcPts val="1000"/>
-              </a:spcAft>
-            </a:pPr>
-            <a:r>
-              <a:rPr sz="1600">
-                <a:solidFill>
-                  <a:srgbClr val="16191D"/>
-                </a:solidFill>
-                <a:latin typeface="Apple SD Gothic Neo"/>
-              </a:rPr>
-              <a:t>• tests/ — unit 5종 + integration 2종 = 50개 통과</a:t>
-            </a:r>
-          </a:p>
-        </p:txBody>
-      </p:sp>
-    </p:spTree>
-  </p:cSld>
-  <p:clrMapOvr>
-    <a:masterClrMapping/>
-  </p:clrMapOvr>
-</p:sld>
-</file>
-
-<file path=ppt/slides/slide7.xml><?xml version="1.0" encoding="utf-8"?>
-<p:sld xmlns:a="http://schemas.openxmlformats.org/drawingml/2006/main" xmlns:p="http://schemas.openxmlformats.org/presentationml/2006/main" xmlns:r="http://schemas.openxmlformats.org/officeDocument/2006/relationships">
-  <p:cSld>
-    <p:spTree>
-      <p:nvGrpSpPr>
-        <p:cNvPr id="1" name=""/>
-        <p:cNvGrpSpPr/>
-        <p:nvPr/>
-      </p:nvGrpSpPr>
-      <p:grpSpPr/>
-      <p:sp>
-        <p:nvSpPr>
-          <p:cNvPr id="2" name="TextBox 1"/>
-          <p:cNvSpPr txBox="1"/>
-          <p:nvPr/>
-        </p:nvSpPr>
-        <p:spPr>
-          <a:xfrm>
-            <a:off x="600000" y="420000"/>
-            <a:ext cx="11000000" cy="900000"/>
-          </a:xfrm>
-          <a:prstGeom prst="rect">
-            <a:avLst/>
-          </a:prstGeom>
-          <a:noFill/>
-        </p:spPr>
-        <p:txBody>
-          <a:bodyPr wrap="square">
-            <a:spAutoFit/>
-          </a:bodyPr>
-          <a:lstStyle/>
-          <a:p>
-            <a:r>
-              <a:rPr sz="3000" b="1">
-                <a:solidFill>
-                  <a:srgbClr val="16191D"/>
-                </a:solidFill>
-                <a:latin typeface="Apple SD Gothic Neo"/>
-              </a:rPr>
-              <a:t>Before / After — 같은 조건, 같은 입력</a:t>
+              <a:t>같은 입력, 같은 조건 — 2회 실행한 결과</a:t>
             </a:r>
           </a:p>
         </p:txBody>
@@ -4641,7 +3584,7 @@
         </p:nvGraphicFramePr>
         <p:xfrm>
           <a:off x="600000" y="1350000"/>
-          <a:ext cx="11000000" cy="3360000"/>
+          <a:ext cx="11000000" cy="2940000"/>
         </p:xfrm>
         <a:graphic>
           <a:graphicData uri="http://schemas.openxmlformats.org/drawingml/2006/table">
@@ -4690,7 +3633,7 @@
                         </a:defRPr>
                       </a:pPr>
                       <a:r>
-                        <a:t>Before (keyword)</a:t>
+                        <a:t>Before</a:t>
                       </a:r>
                     </a:p>
                   </a:txBody>
@@ -4710,7 +3653,7 @@
                         </a:defRPr>
                       </a:pPr>
                       <a:r>
-                        <a:t>After (RAG)</a:t>
+                        <a:t>After</a:t>
                       </a:r>
                     </a:p>
                   </a:txBody>
@@ -4772,7 +3715,7 @@
                         </a:defRPr>
                       </a:pPr>
                       <a:r>
-                        <a:t>13/40 = 0.3250</a:t>
+                        <a:t>0.3250</a:t>
                       </a:r>
                     </a:p>
                   </a:txBody>
@@ -4792,7 +3735,7 @@
                         </a:defRPr>
                       </a:pPr>
                       <a:r>
-                        <a:t>34/40 = 0.8500</a:t>
+                        <a:t>0.8500</a:t>
                       </a:r>
                     </a:p>
                   </a:txBody>
@@ -4916,7 +3859,7 @@
                         </a:defRPr>
                       </a:pPr>
                       <a:r>
-                        <a:t>E2E 5문항 (실서버)</a:t>
+                        <a:t>E2E 5문항(실서버)</a:t>
                       </a:r>
                     </a:p>
                   </a:txBody>
@@ -4936,7 +3879,7 @@
                         </a:defRPr>
                       </a:pPr>
                       <a:r>
-                        <a:t>1/5 = 0.2000</a:t>
+                        <a:t>0.2000</a:t>
                       </a:r>
                     </a:p>
                   </a:txBody>
@@ -4956,7 +3899,7 @@
                         </a:defRPr>
                       </a:pPr>
                       <a:r>
-                        <a:t>5/5 = 1.0000</a:t>
+                        <a:t>1.0000</a:t>
                       </a:r>
                     </a:p>
                   </a:txBody>
@@ -4977,6 +3920,88 @@
                       </a:pPr>
                       <a:r>
                         <a:t>+0.8000</a:t>
+                      </a:r>
+                    </a:p>
+                  </a:txBody>
+                  <a:tcPr/>
+                </a:tc>
+              </a:tr>
+              <a:tr h="420000">
+                <a:tc>
+                  <a:txBody>
+                    <a:bodyPr/>
+                    <a:lstStyle/>
+                    <a:p>
+                      <a:pPr>
+                        <a:defRPr sz="1400" b="0">
+                          <a:solidFill>
+                            <a:srgbClr val="16191D"/>
+                          </a:solidFill>
+                          <a:latin typeface="Apple SD Gothic Neo"/>
+                        </a:defRPr>
+                      </a:pPr>
+                      <a:r>
+                        <a:t>회귀 질의 10문항</a:t>
+                      </a:r>
+                    </a:p>
+                  </a:txBody>
+                  <a:tcPr/>
+                </a:tc>
+                <a:tc>
+                  <a:txBody>
+                    <a:bodyPr/>
+                    <a:lstStyle/>
+                    <a:p>
+                      <a:pPr algn="r">
+                        <a:defRPr sz="1400" b="0">
+                          <a:solidFill>
+                            <a:srgbClr val="16191D"/>
+                          </a:solidFill>
+                          <a:latin typeface="Apple SD Gothic Neo"/>
+                        </a:defRPr>
+                      </a:pPr>
+                      <a:r>
+                        <a:t>3/10</a:t>
+                      </a:r>
+                    </a:p>
+                  </a:txBody>
+                  <a:tcPr/>
+                </a:tc>
+                <a:tc>
+                  <a:txBody>
+                    <a:bodyPr/>
+                    <a:lstStyle/>
+                    <a:p>
+                      <a:pPr algn="r">
+                        <a:defRPr sz="1400" b="0">
+                          <a:solidFill>
+                            <a:srgbClr val="16191D"/>
+                          </a:solidFill>
+                          <a:latin typeface="Apple SD Gothic Neo"/>
+                        </a:defRPr>
+                      </a:pPr>
+                      <a:r>
+                        <a:t>10/10</a:t>
+                      </a:r>
+                    </a:p>
+                  </a:txBody>
+                  <a:tcPr/>
+                </a:tc>
+                <a:tc>
+                  <a:txBody>
+                    <a:bodyPr/>
+                    <a:lstStyle/>
+                    <a:p>
+                      <a:pPr algn="r">
+                        <a:defRPr sz="1400" b="0">
+                          <a:solidFill>
+                            <a:srgbClr val="16191D"/>
+                          </a:solidFill>
+                          <a:latin typeface="Apple SD Gothic Neo"/>
+                        </a:defRPr>
+                      </a:pPr>
+                      <a:r>
+                        <a:t>+0.7000</a:t>
                       </a:r>
                     </a:p>
                   </a:txBody>
@@ -5080,7 +4105,7 @@
                         </a:defRPr>
                       </a:pPr>
                       <a:r>
-                        <a:t>E2E 요청 지연 p50</a:t>
+                        <a:t>비용 / retry</a:t>
                       </a:r>
                     </a:p>
                   </a:txBody>
@@ -5100,7 +4125,7 @@
                         </a:defRPr>
                       </a:pPr>
                       <a:r>
-                        <a:t>750.76ms</a:t>
+                        <a:t>$0 / 1</a:t>
                       </a:r>
                     </a:p>
                   </a:txBody>
@@ -5120,7 +4145,7 @@
                         </a:defRPr>
                       </a:pPr>
                       <a:r>
-                        <a:t>819.73ms</a:t>
+                        <a:t>$0 / 1</a:t>
                       </a:r>
                     </a:p>
                   </a:txBody>
@@ -5140,171 +4165,7 @@
                         </a:defRPr>
                       </a:pPr>
                       <a:r>
-                        <a:t>+68.97ms</a:t>
-                      </a:r>
-                    </a:p>
-                  </a:txBody>
-                  <a:tcPr/>
-                </a:tc>
-              </a:tr>
-              <a:tr h="420000">
-                <a:tc>
-                  <a:txBody>
-                    <a:bodyPr/>
-                    <a:lstStyle/>
-                    <a:p>
-                      <a:pPr>
-                        <a:defRPr sz="1400" b="0">
-                          <a:solidFill>
-                            <a:srgbClr val="16191D"/>
-                          </a:solidFill>
-                          <a:latin typeface="Apple SD Gothic Neo"/>
-                        </a:defRPr>
-                      </a:pPr>
-                      <a:r>
-                        <a:t>비용</a:t>
-                      </a:r>
-                    </a:p>
-                  </a:txBody>
-                  <a:tcPr/>
-                </a:tc>
-                <a:tc>
-                  <a:txBody>
-                    <a:bodyPr/>
-                    <a:lstStyle/>
-                    <a:p>
-                      <a:pPr algn="r">
-                        <a:defRPr sz="1400" b="0">
-                          <a:solidFill>
-                            <a:srgbClr val="16191D"/>
-                          </a:solidFill>
-                          <a:latin typeface="Apple SD Gothic Neo"/>
-                        </a:defRPr>
-                      </a:pPr>
-                      <a:r>
-                        <a:t>$0.000000</a:t>
-                      </a:r>
-                    </a:p>
-                  </a:txBody>
-                  <a:tcPr/>
-                </a:tc>
-                <a:tc>
-                  <a:txBody>
-                    <a:bodyPr/>
-                    <a:lstStyle/>
-                    <a:p>
-                      <a:pPr algn="r">
-                        <a:defRPr sz="1400" b="0">
-                          <a:solidFill>
-                            <a:srgbClr val="16191D"/>
-                          </a:solidFill>
-                          <a:latin typeface="Apple SD Gothic Neo"/>
-                        </a:defRPr>
-                      </a:pPr>
-                      <a:r>
-                        <a:t>$0.000000</a:t>
-                      </a:r>
-                    </a:p>
-                  </a:txBody>
-                  <a:tcPr/>
-                </a:tc>
-                <a:tc>
-                  <a:txBody>
-                    <a:bodyPr/>
-                    <a:lstStyle/>
-                    <a:p>
-                      <a:pPr algn="r">
-                        <a:defRPr sz="1400" b="0">
-                          <a:solidFill>
-                            <a:srgbClr val="16191D"/>
-                          </a:solidFill>
-                          <a:latin typeface="Apple SD Gothic Neo"/>
-                        </a:defRPr>
-                      </a:pPr>
-                      <a:r>
-                        <a:t>0 (로컬)</a:t>
-                      </a:r>
-                    </a:p>
-                  </a:txBody>
-                  <a:tcPr/>
-                </a:tc>
-              </a:tr>
-              <a:tr h="420000">
-                <a:tc>
-                  <a:txBody>
-                    <a:bodyPr/>
-                    <a:lstStyle/>
-                    <a:p>
-                      <a:pPr>
-                        <a:defRPr sz="1400" b="0">
-                          <a:solidFill>
-                            <a:srgbClr val="16191D"/>
-                          </a:solidFill>
-                          <a:latin typeface="Apple SD Gothic Neo"/>
-                        </a:defRPr>
-                      </a:pPr>
-                      <a:r>
-                        <a:t>회귀 질의 10문항 (PDF 9쪽)</a:t>
-                      </a:r>
-                    </a:p>
-                  </a:txBody>
-                  <a:tcPr/>
-                </a:tc>
-                <a:tc>
-                  <a:txBody>
-                    <a:bodyPr/>
-                    <a:lstStyle/>
-                    <a:p>
-                      <a:pPr algn="r">
-                        <a:defRPr sz="1400" b="0">
-                          <a:solidFill>
-                            <a:srgbClr val="16191D"/>
-                          </a:solidFill>
-                          <a:latin typeface="Apple SD Gothic Neo"/>
-                        </a:defRPr>
-                      </a:pPr>
-                      <a:r>
-                        <a:t>3/10</a:t>
-                      </a:r>
-                    </a:p>
-                  </a:txBody>
-                  <a:tcPr/>
-                </a:tc>
-                <a:tc>
-                  <a:txBody>
-                    <a:bodyPr/>
-                    <a:lstStyle/>
-                    <a:p>
-                      <a:pPr algn="r">
-                        <a:defRPr sz="1400" b="0">
-                          <a:solidFill>
-                            <a:srgbClr val="16191D"/>
-                          </a:solidFill>
-                          <a:latin typeface="Apple SD Gothic Neo"/>
-                        </a:defRPr>
-                      </a:pPr>
-                      <a:r>
-                        <a:t>10/10</a:t>
-                      </a:r>
-                    </a:p>
-                  </a:txBody>
-                  <a:tcPr/>
-                </a:tc>
-                <a:tc>
-                  <a:txBody>
-                    <a:bodyPr/>
-                    <a:lstStyle/>
-                    <a:p>
-                      <a:pPr algn="r">
-                        <a:defRPr sz="1400" b="0">
-                          <a:solidFill>
-                            <a:srgbClr val="16191D"/>
-                          </a:solidFill>
-                          <a:latin typeface="Apple SD Gothic Neo"/>
-                        </a:defRPr>
-                      </a:pPr>
-                      <a:r>
-                        <a:t>+0.7000</a:t>
+                        <a:t>0 / 0</a:t>
                       </a:r>
                     </a:p>
                   </a:txBody>
@@ -5315,6 +4176,30 @@
           </a:graphicData>
         </a:graphic>
       </p:graphicFrame>
+      <p:pic>
+        <p:nvPicPr>
+          <p:cNvPr id="4" name="Picture 3" descr="04_screen_before_after.jpg"/>
+          <p:cNvPicPr>
+            <a:picLocks noChangeAspect="1"/>
+          </p:cNvPicPr>
+          <p:nvPr/>
+        </p:nvPicPr>
+        <p:blipFill>
+          <a:blip r:embed="rId2"/>
+          <a:stretch>
+            <a:fillRect/>
+          </a:stretch>
+        </p:blipFill>
+        <p:spPr>
+          <a:xfrm>
+            <a:off x="600000" y="4410000"/>
+            <a:ext cx="8107202" cy="4400000"/>
+          </a:xfrm>
+          <a:prstGeom prst="rect">
+            <a:avLst/>
+          </a:prstGeom>
+        </p:spPr>
+      </p:pic>
     </p:spTree>
   </p:cSld>
   <p:clrMapOvr>
@@ -5323,7 +4208,7 @@
 </p:sld>
 </file>
 
-<file path=ppt/slides/slide8.xml><?xml version="1.0" encoding="utf-8"?>
+<file path=ppt/slides/slide4.xml><?xml version="1.0" encoding="utf-8"?>
 <p:sld xmlns:a="http://schemas.openxmlformats.org/drawingml/2006/main" xmlns:p="http://schemas.openxmlformats.org/presentationml/2006/main" xmlns:r="http://schemas.openxmlformats.org/officeDocument/2006/relationships">
   <p:cSld>
     <p:spTree>
@@ -5362,11 +4247,35 @@
                 </a:solidFill>
                 <a:latin typeface="Apple SD Gothic Neo"/>
               </a:rPr>
-              <a:t>좋았던 것과, 안 좋았던 것</a:t>
-            </a:r>
-          </a:p>
-        </p:txBody>
-      </p:sp>
+              <a:t>LangGraph v2 — 판정 지점만 갈아끼운 그래프</a:t>
+            </a:r>
+          </a:p>
+        </p:txBody>
+      </p:sp>
+      <p:pic>
+        <p:nvPicPr>
+          <p:cNvPr id="3" name="Picture 2" descr="05_architecture_graph.jpg"/>
+          <p:cNvPicPr>
+            <a:picLocks noChangeAspect="1"/>
+          </p:cNvPicPr>
+          <p:nvPr/>
+        </p:nvPicPr>
+        <p:blipFill>
+          <a:blip r:embed="rId2"/>
+          <a:stretch>
+            <a:fillRect/>
+          </a:stretch>
+        </p:blipFill>
+        <p:spPr>
+          <a:xfrm>
+            <a:off x="600000" y="1350000"/>
+            <a:ext cx="9758064" cy="4400000"/>
+          </a:xfrm>
+          <a:prstGeom prst="rect">
+            <a:avLst/>
+          </a:prstGeom>
+        </p:spPr>
+      </p:pic>
     </p:spTree>
   </p:cSld>
   <p:clrMapOvr>
@@ -5375,7 +4284,7 @@
 </p:sld>
 </file>
 
-<file path=ppt/slides/slide9.xml><?xml version="1.0" encoding="utf-8"?>
+<file path=ppt/slides/slide5.xml><?xml version="1.0" encoding="utf-8"?>
 <p:sld xmlns:a="http://schemas.openxmlformats.org/drawingml/2006/main" xmlns:p="http://schemas.openxmlformats.org/presentationml/2006/main" xmlns:r="http://schemas.openxmlformats.org/officeDocument/2006/relationships">
   <p:cSld>
     <p:spTree>
@@ -5414,7 +4323,7 @@
                 </a:solidFill>
                 <a:latin typeface="Apple SD Gothic Neo"/>
               </a:rPr>
-              <a:t>아직 확인하지 않은 것</a:t>
+              <a:t>런북 임베딩 검색 + 확신 없으면 기존 경로로</a:t>
             </a:r>
           </a:p>
         </p:txBody>
@@ -5453,7 +4362,7 @@
                 </a:solidFill>
                 <a:latin typeface="Apple SD Gothic Neo"/>
               </a:rPr>
-              <a:t>• 40문항 라벨을 제가 만들었다 — 자기 평가라서 카테고리별로 나눠서 보고했습니다. 전체 수치로 일반화하지 않습니다</a:t>
+              <a:t>• agent/rag/embedder.py — Ollama qwen3-embedding:0.6b</a:t>
             </a:r>
           </a:p>
         </p:txBody>
@@ -5492,7 +4401,7 @@
                 </a:solidFill>
                 <a:latin typeface="Apple SD Gothic Neo"/>
               </a:rPr>
-              <a:t>• keyword 폴백 규칙은 그대로 — 신규 유형마다 함께 갱신해야 합니다</a:t>
+              <a:t>• agent/rag/index.py — 10문서 인덱스 + JSON 캐시</a:t>
             </a:r>
           </a:p>
         </p:txBody>
@@ -5531,7 +4440,369 @@
                 </a:solidFill>
                 <a:latin typeface="Apple SD Gothic Neo"/>
               </a:rPr>
-              <a:t>• 비용 0은 로컬 백엔드 때문 — 실 API 비용은 별도 측정 필요</a:t>
+              <a:t>• 선택 근거는 /health·metadata·SSE로 노출</a:t>
+            </a:r>
+          </a:p>
+        </p:txBody>
+      </p:sp>
+      <p:pic>
+        <p:nvPicPr>
+          <p:cNvPr id="6" name="Picture 5" descr="03_screen_rag_evidence.jpg"/>
+          <p:cNvPicPr>
+            <a:picLocks noChangeAspect="1"/>
+          </p:cNvPicPr>
+          <p:nvPr/>
+        </p:nvPicPr>
+        <p:blipFill>
+          <a:blip r:embed="rId2"/>
+          <a:stretch>
+            <a:fillRect/>
+          </a:stretch>
+        </p:blipFill>
+        <p:spPr>
+          <a:xfrm>
+            <a:off x="600000" y="2910000"/>
+            <a:ext cx="8107202" cy="4400000"/>
+          </a:xfrm>
+          <a:prstGeom prst="rect">
+            <a:avLst/>
+          </a:prstGeom>
+        </p:spPr>
+      </p:pic>
+    </p:spTree>
+  </p:cSld>
+  <p:clrMapOvr>
+    <a:masterClrMapping/>
+  </p:clrMapOvr>
+</p:sld>
+</file>
+
+<file path=ppt/slides/slide6.xml><?xml version="1.0" encoding="utf-8"?>
+<p:sld xmlns:a="http://schemas.openxmlformats.org/drawingml/2006/main" xmlns:p="http://schemas.openxmlformats.org/presentationml/2006/main" xmlns:r="http://schemas.openxmlformats.org/officeDocument/2006/relationships">
+  <p:cSld>
+    <p:spTree>
+      <p:nvGrpSpPr>
+        <p:cNvPr id="1" name=""/>
+        <p:cNvGrpSpPr/>
+        <p:nvPr/>
+      </p:nvGrpSpPr>
+      <p:grpSpPr/>
+      <p:sp>
+        <p:nvSpPr>
+          <p:cNvPr id="2" name="TextBox 1"/>
+          <p:cNvSpPr txBox="1"/>
+          <p:nvPr/>
+        </p:nvSpPr>
+        <p:spPr>
+          <a:xfrm>
+            <a:off x="600000" y="420000"/>
+            <a:ext cx="11000000" cy="900000"/>
+          </a:xfrm>
+          <a:prstGeom prst="rect">
+            <a:avLst/>
+          </a:prstGeom>
+          <a:noFill/>
+        </p:spPr>
+        <p:txBody>
+          <a:bodyPr wrap="square">
+            <a:spAutoFit/>
+          </a:bodyPr>
+          <a:lstStyle/>
+          <a:p>
+            <a:r>
+              <a:rPr sz="3000" b="1">
+                <a:solidFill>
+                  <a:srgbClr val="16191D"/>
+                </a:solidFill>
+                <a:latin typeface="Apple SD Gothic Neo"/>
+              </a:rPr>
+              <a:t>MCP로 모니터링·런북을 조회하고, 데이터 선택은 한 곳에서</a:t>
+            </a:r>
+          </a:p>
+        </p:txBody>
+      </p:sp>
+      <p:sp>
+        <p:nvSpPr>
+          <p:cNvPr id="3" name="TextBox 2"/>
+          <p:cNvSpPr txBox="1"/>
+          <p:nvPr/>
+        </p:nvSpPr>
+        <p:spPr>
+          <a:xfrm>
+            <a:off x="700000" y="1350000"/>
+            <a:ext cx="10500000" cy="500000"/>
+          </a:xfrm>
+          <a:prstGeom prst="rect">
+            <a:avLst/>
+          </a:prstGeom>
+          <a:noFill/>
+        </p:spPr>
+        <p:txBody>
+          <a:bodyPr wrap="square">
+            <a:spAutoFit/>
+          </a:bodyPr>
+          <a:lstStyle/>
+          <a:p>
+            <a:pPr>
+              <a:spcAft>
+                <a:spcPts val="1000"/>
+              </a:spcAft>
+            </a:pPr>
+            <a:r>
+              <a:rPr sz="1600">
+                <a:solidFill>
+                  <a:srgbClr val="16191D"/>
+                </a:solidFill>
+                <a:latin typeface="Apple SD Gothic Neo"/>
+              </a:rPr>
+              <a:t>• agent/mcp_client.py — stdio subprocess로 ops 서버 연결, find_resource_template로 런북 URI 탐색</a:t>
+            </a:r>
+          </a:p>
+        </p:txBody>
+      </p:sp>
+      <p:sp>
+        <p:nvSpPr>
+          <p:cNvPr id="4" name="TextBox 3"/>
+          <p:cNvSpPr txBox="1"/>
+          <p:nvPr/>
+        </p:nvSpPr>
+        <p:spPr>
+          <a:xfrm>
+            <a:off x="700000" y="1870000"/>
+            <a:ext cx="10500000" cy="500000"/>
+          </a:xfrm>
+          <a:prstGeom prst="rect">
+            <a:avLst/>
+          </a:prstGeom>
+          <a:noFill/>
+        </p:spPr>
+        <p:txBody>
+          <a:bodyPr wrap="square">
+            <a:spAutoFit/>
+          </a:bodyPr>
+          <a:lstStyle/>
+          <a:p>
+            <a:pPr>
+              <a:spcAft>
+                <a:spcPts val="1000"/>
+              </a:spcAft>
+            </a:pPr>
+            <a:r>
+              <a:rPr sz="1600">
+                <a:solidFill>
+                  <a:srgbClr val="16191D"/>
+                </a:solidFill>
+                <a:latin typeface="Apple SD Gothic Neo"/>
+              </a:rPr>
+              <a:t>• mcp_server_docs.py는 decoy — 의도대로 쓰지 않는다</a:t>
+            </a:r>
+          </a:p>
+        </p:txBody>
+      </p:sp>
+      <p:sp>
+        <p:nvSpPr>
+          <p:cNvPr id="5" name="TextBox 4"/>
+          <p:cNvSpPr txBox="1"/>
+          <p:nvPr/>
+        </p:nvSpPr>
+        <p:spPr>
+          <a:xfrm>
+            <a:off x="700000" y="2390000"/>
+            <a:ext cx="10500000" cy="500000"/>
+          </a:xfrm>
+          <a:prstGeom prst="rect">
+            <a:avLst/>
+          </a:prstGeom>
+          <a:noFill/>
+        </p:spPr>
+        <p:txBody>
+          <a:bodyPr wrap="square">
+            <a:spAutoFit/>
+          </a:bodyPr>
+          <a:lstStyle/>
+          <a:p>
+            <a:pPr>
+              <a:spcAft>
+                <a:spcPts val="1000"/>
+              </a:spcAft>
+            </a:pPr>
+            <a:r>
+              <a:rPr sz="1600">
+                <a:solidFill>
+                  <a:srgbClr val="16191D"/>
+                </a:solidFill>
+                <a:latin typeface="Apple SD Gothic Neo"/>
+              </a:rPr>
+              <a:t>• 파일 선택이 5곳에 흩어져 있으면 시스템만 늘고 조사 대상은 6개로 잘린다 → 한 곳으로 모았다</a:t>
+            </a:r>
+          </a:p>
+        </p:txBody>
+      </p:sp>
+    </p:spTree>
+  </p:cSld>
+  <p:clrMapOvr>
+    <a:masterClrMapping/>
+  </p:clrMapOvr>
+</p:sld>
+</file>
+
+<file path=ppt/slides/slide7.xml><?xml version="1.0" encoding="utf-8"?>
+<p:sld xmlns:a="http://schemas.openxmlformats.org/drawingml/2006/main" xmlns:p="http://schemas.openxmlformats.org/presentationml/2006/main" xmlns:r="http://schemas.openxmlformats.org/officeDocument/2006/relationships">
+  <p:cSld>
+    <p:spTree>
+      <p:nvGrpSpPr>
+        <p:cNvPr id="1" name=""/>
+        <p:cNvGrpSpPr/>
+        <p:nvPr/>
+      </p:nvGrpSpPr>
+      <p:grpSpPr/>
+      <p:sp>
+        <p:nvSpPr>
+          <p:cNvPr id="2" name="TextBox 1"/>
+          <p:cNvSpPr txBox="1"/>
+          <p:nvPr/>
+        </p:nvSpPr>
+        <p:spPr>
+          <a:xfrm>
+            <a:off x="600000" y="420000"/>
+            <a:ext cx="11000000" cy="900000"/>
+          </a:xfrm>
+          <a:prstGeom prst="rect">
+            <a:avLst/>
+          </a:prstGeom>
+          <a:noFill/>
+        </p:spPr>
+        <p:txBody>
+          <a:bodyPr wrap="square">
+            <a:spAutoFit/>
+          </a:bodyPr>
+          <a:lstStyle/>
+          <a:p>
+            <a:r>
+              <a:rPr sz="3000" b="1">
+                <a:solidFill>
+                  <a:srgbClr val="16191D"/>
+                </a:solidFill>
+                <a:latin typeface="Apple SD Gothic Neo"/>
+              </a:rPr>
+              <a:t>판정을 바꾼 게 아니라, · 판단의 근거를 남기고 측정할 수 있게 바꾼 것</a:t>
+            </a:r>
+          </a:p>
+        </p:txBody>
+      </p:sp>
+      <p:sp>
+        <p:nvSpPr>
+          <p:cNvPr id="3" name="TextBox 2"/>
+          <p:cNvSpPr txBox="1"/>
+          <p:nvPr/>
+        </p:nvSpPr>
+        <p:spPr>
+          <a:xfrm>
+            <a:off x="700000" y="1350000"/>
+            <a:ext cx="10500000" cy="500000"/>
+          </a:xfrm>
+          <a:prstGeom prst="rect">
+            <a:avLst/>
+          </a:prstGeom>
+          <a:noFill/>
+        </p:spPr>
+        <p:txBody>
+          <a:bodyPr wrap="square">
+            <a:spAutoFit/>
+          </a:bodyPr>
+          <a:lstStyle/>
+          <a:p>
+            <a:pPr>
+              <a:spcAft>
+                <a:spcPts val="1000"/>
+              </a:spcAft>
+            </a:pPr>
+            <a:r>
+              <a:rPr sz="1600">
+                <a:solidFill>
+                  <a:srgbClr val="16191D"/>
+                </a:solidFill>
+                <a:latin typeface="Apple SD Gothic Neo"/>
+              </a:rPr>
+              <a:t>• RAG는 임베딩보다 입력 정의와 게이트가 핵심이다</a:t>
+            </a:r>
+          </a:p>
+        </p:txBody>
+      </p:sp>
+      <p:sp>
+        <p:nvSpPr>
+          <p:cNvPr id="4" name="TextBox 3"/>
+          <p:cNvSpPr txBox="1"/>
+          <p:nvPr/>
+        </p:nvSpPr>
+        <p:spPr>
+          <a:xfrm>
+            <a:off x="700000" y="1870000"/>
+            <a:ext cx="10500000" cy="500000"/>
+          </a:xfrm>
+          <a:prstGeom prst="rect">
+            <a:avLst/>
+          </a:prstGeom>
+          <a:noFill/>
+        </p:spPr>
+        <p:txBody>
+          <a:bodyPr wrap="square">
+            <a:spAutoFit/>
+          </a:bodyPr>
+          <a:lstStyle/>
+          <a:p>
+            <a:pPr>
+              <a:spcAft>
+                <a:spcPts val="1000"/>
+              </a:spcAft>
+            </a:pPr>
+            <a:r>
+              <a:rPr sz="1600">
+                <a:solidFill>
+                  <a:srgbClr val="16191D"/>
+                </a:solidFill>
+                <a:latin typeface="Apple SD Gothic Neo"/>
+              </a:rPr>
+              <a:t>• 개선 전에 기준선을 먼저 재야 "개선"을 말할 수 있다</a:t>
+            </a:r>
+          </a:p>
+        </p:txBody>
+      </p:sp>
+      <p:sp>
+        <p:nvSpPr>
+          <p:cNvPr id="5" name="TextBox 4"/>
+          <p:cNvSpPr txBox="1"/>
+          <p:nvPr/>
+        </p:nvSpPr>
+        <p:spPr>
+          <a:xfrm>
+            <a:off x="700000" y="2390000"/>
+            <a:ext cx="10500000" cy="500000"/>
+          </a:xfrm>
+          <a:prstGeom prst="rect">
+            <a:avLst/>
+          </a:prstGeom>
+          <a:noFill/>
+        </p:spPr>
+        <p:txBody>
+          <a:bodyPr wrap="square">
+            <a:spAutoFit/>
+          </a:bodyPr>
+          <a:lstStyle/>
+          <a:p>
+            <a:pPr>
+              <a:spcAft>
+                <a:spcPts val="1000"/>
+              </a:spcAft>
+            </a:pPr>
+            <a:r>
+              <a:rPr sz="1600">
+                <a:solidFill>
+                  <a:srgbClr val="16191D"/>
+                </a:solidFill>
+                <a:latin typeface="Apple SD Gothic Neo"/>
+              </a:rPr>
+              <a:t>• 근거를 남기면 질문이 와도 바로 보여줄 수 있다</a:t>
             </a:r>
           </a:p>
         </p:txBody>
@@ -5570,7 +4841,7 @@
                 </a:solidFill>
                 <a:latin typeface="Apple SD Gothic Neo"/>
               </a:rPr>
-              <a:t>• 실제 장애 티켓·운영 로그로 라벨 세트 재구축</a:t>
+              <a:t>• 실제 장애 티켓으로 라벨 세트 재구축 (지금은 자기 평가)</a:t>
             </a:r>
           </a:p>
         </p:txBody>
@@ -5609,7 +4880,7 @@
                 </a:solidFill>
                 <a:latin typeface="Apple SD Gothic Neo"/>
               </a:rPr>
-              <a:t>• 동시 요청 부하에서의 지연 측정</a:t>
+              <a:t>• LLM-as-judge 평가 추가 · Research 서브그래프 분리</a:t>
             </a:r>
           </a:p>
         </p:txBody>
@@ -5649,45 +4920,6 @@
                 <a:latin typeface="Apple SD Gothic Neo"/>
               </a:rPr>
               <a:t>• 실 OpenAI 백엔드로 비용·지연 재측정</a:t>
-            </a:r>
-          </a:p>
-        </p:txBody>
-      </p:sp>
-      <p:sp>
-        <p:nvSpPr>
-          <p:cNvPr id="9" name="TextBox 8"/>
-          <p:cNvSpPr txBox="1"/>
-          <p:nvPr/>
-        </p:nvSpPr>
-        <p:spPr>
-          <a:xfrm>
-            <a:off x="700000" y="4470000"/>
-            <a:ext cx="10500000" cy="500000"/>
-          </a:xfrm>
-          <a:prstGeom prst="rect">
-            <a:avLst/>
-          </a:prstGeom>
-          <a:noFill/>
-        </p:spPr>
-        <p:txBody>
-          <a:bodyPr wrap="square">
-            <a:spAutoFit/>
-          </a:bodyPr>
-          <a:lstStyle/>
-          <a:p>
-            <a:pPr>
-              <a:spcAft>
-                <a:spcPts val="1000"/>
-              </a:spcAft>
-            </a:pPr>
-            <a:r>
-              <a:rPr sz="1600">
-                <a:solidFill>
-                  <a:srgbClr val="16191D"/>
-                </a:solidFill>
-                <a:latin typeface="Apple SD Gothic Neo"/>
-              </a:rPr>
-              <a:t>• keyword 규칙 우선순위를 데이터 기반으로 재설계할지 판단</a:t>
             </a:r>
           </a:p>
         </p:txBody>

--- a/doc/reports/presentation.pptx
+++ b/doc/reports/presentation.pptx
@@ -3102,8 +3102,8 @@
         </p:nvSpPr>
         <p:spPr>
           <a:xfrm>
-            <a:off x="800000" y="1800000"/>
-            <a:ext cx="10600000" cy="1016000"/>
+            <a:off x="600000" y="380000"/>
+            <a:ext cx="10992000" cy="900000"/>
           </a:xfrm>
           <a:prstGeom prst="rect">
             <a:avLst/>
@@ -3116,13 +3116,8 @@
           </a:bodyPr>
           <a:lstStyle/>
           <a:p>
-            <a:pPr>
-              <a:spcAft>
-                <a:spcPts val="1600"/>
-              </a:spcAft>
-            </a:pPr>
-            <a:r>
-              <a:rPr sz="4000" b="1">
+            <a:r>
+              <a:rPr sz="3000" b="1">
                 <a:solidFill>
                   <a:srgbClr val="16191D"/>
                 </a:solidFill>
@@ -3159,8 +3154,8 @@
         </p:nvSpPr>
         <p:spPr>
           <a:xfrm>
-            <a:off x="600000" y="420000"/>
-            <a:ext cx="11000000" cy="900000"/>
+            <a:off x="600000" y="380000"/>
+            <a:ext cx="10992000" cy="900000"/>
           </a:xfrm>
           <a:prstGeom prst="rect">
             <a:avLst/>
@@ -3194,8 +3189,8 @@
           <p:nvPr/>
         </p:nvGraphicFramePr>
         <p:xfrm>
-          <a:off x="600000" y="1350000"/>
-          <a:ext cx="11000000" cy="2100000"/>
+          <a:off x="600000" y="1400000"/>
+          <a:ext cx="10992000" cy="2100000"/>
         </p:xfrm>
         <a:graphic>
           <a:graphicData uri="http://schemas.openxmlformats.org/drawingml/2006/table">
@@ -3204,9 +3199,9 @@
                 <a:tableStyleId>{5C22544A-7EE6-4342-B048-85BDC9FD1C3A}</a:tableStyleId>
               </a:tblPr>
               <a:tblGrid>
-                <a:gridCol w="3666666"/>
-                <a:gridCol w="3666666"/>
-                <a:gridCol w="3666668"/>
+                <a:gridCol w="3664000"/>
+                <a:gridCol w="3664000"/>
+                <a:gridCol w="3664000"/>
               </a:tblGrid>
               <a:tr h="420000">
                 <a:tc>
@@ -3215,7 +3210,7 @@
                     <a:lstStyle/>
                     <a:p>
                       <a:pPr>
-                        <a:defRPr sz="1200" b="1">
+                        <a:defRPr sz="1300" b="1">
                           <a:solidFill>
                             <a:srgbClr val="5B6470"/>
                           </a:solidFill>
@@ -3235,7 +3230,7 @@
                     <a:lstStyle/>
                     <a:p>
                       <a:pPr>
-                        <a:defRPr sz="1200" b="1">
+                        <a:defRPr sz="1300" b="1">
                           <a:solidFill>
                             <a:srgbClr val="5B6470"/>
                           </a:solidFill>
@@ -3255,7 +3250,7 @@
                     <a:lstStyle/>
                     <a:p>
                       <a:pPr>
-                        <a:defRPr sz="1200" b="1">
+                        <a:defRPr sz="1300" b="1">
                           <a:solidFill>
                             <a:srgbClr val="5B6470"/>
                           </a:solidFill>
@@ -3548,8 +3543,8 @@
         </p:nvSpPr>
         <p:spPr>
           <a:xfrm>
-            <a:off x="600000" y="420000"/>
-            <a:ext cx="11000000" cy="900000"/>
+            <a:off x="600000" y="380000"/>
+            <a:ext cx="10992000" cy="900000"/>
           </a:xfrm>
           <a:prstGeom prst="rect">
             <a:avLst/>
@@ -3583,8 +3578,8 @@
           <p:nvPr/>
         </p:nvGraphicFramePr>
         <p:xfrm>
-          <a:off x="600000" y="1350000"/>
-          <a:ext cx="11000000" cy="2940000"/>
+          <a:off x="600000" y="1400000"/>
+          <a:ext cx="10992000" cy="2940000"/>
         </p:xfrm>
         <a:graphic>
           <a:graphicData uri="http://schemas.openxmlformats.org/drawingml/2006/table">
@@ -3593,10 +3588,10 @@
                 <a:tableStyleId>{5C22544A-7EE6-4342-B048-85BDC9FD1C3A}</a:tableStyleId>
               </a:tblPr>
               <a:tblGrid>
-                <a:gridCol w="2750000"/>
-                <a:gridCol w="2750000"/>
-                <a:gridCol w="2750000"/>
-                <a:gridCol w="2750000"/>
+                <a:gridCol w="2748000"/>
+                <a:gridCol w="2748000"/>
+                <a:gridCol w="2748000"/>
+                <a:gridCol w="2748000"/>
               </a:tblGrid>
               <a:tr h="420000">
                 <a:tc>
@@ -3605,7 +3600,7 @@
                     <a:lstStyle/>
                     <a:p>
                       <a:pPr>
-                        <a:defRPr sz="1200" b="1">
+                        <a:defRPr sz="1300" b="1">
                           <a:solidFill>
                             <a:srgbClr val="5B6470"/>
                           </a:solidFill>
@@ -3625,7 +3620,7 @@
                     <a:lstStyle/>
                     <a:p>
                       <a:pPr>
-                        <a:defRPr sz="1200" b="1">
+                        <a:defRPr sz="1300" b="1">
                           <a:solidFill>
                             <a:srgbClr val="5B6470"/>
                           </a:solidFill>
@@ -3645,7 +3640,7 @@
                     <a:lstStyle/>
                     <a:p>
                       <a:pPr>
-                        <a:defRPr sz="1200" b="1">
+                        <a:defRPr sz="1300" b="1">
                           <a:solidFill>
                             <a:srgbClr val="5B6470"/>
                           </a:solidFill>
@@ -3665,7 +3660,7 @@
                     <a:lstStyle/>
                     <a:p>
                       <a:pPr>
-                        <a:defRPr sz="1200" b="1">
+                        <a:defRPr sz="1300" b="1">
                           <a:solidFill>
                             <a:srgbClr val="5B6470"/>
                           </a:solidFill>
@@ -4192,14 +4187,48 @@
         </p:blipFill>
         <p:spPr>
           <a:xfrm>
-            <a:off x="600000" y="4410000"/>
-            <a:ext cx="8107202" cy="4400000"/>
+            <a:off x="600000" y="4480000"/>
+            <a:ext cx="3136531" cy="1700000"/>
           </a:xfrm>
           <a:prstGeom prst="rect">
             <a:avLst/>
           </a:prstGeom>
         </p:spPr>
       </p:pic>
+      <p:sp>
+        <p:nvSpPr>
+          <p:cNvPr id="5" name="TextBox 4"/>
+          <p:cNvSpPr txBox="1"/>
+          <p:nvPr/>
+        </p:nvSpPr>
+        <p:spPr>
+          <a:xfrm>
+            <a:off x="600000" y="6240000"/>
+            <a:ext cx="10992000" cy="300000"/>
+          </a:xfrm>
+          <a:prstGeom prst="rect">
+            <a:avLst/>
+          </a:prstGeom>
+          <a:noFill/>
+        </p:spPr>
+        <p:txBody>
+          <a:bodyPr wrap="none">
+            <a:spAutoFit/>
+          </a:bodyPr>
+          <a:lstStyle/>
+          <a:p>
+            <a:r>
+              <a:rPr sz="1200">
+                <a:solidFill>
+                  <a:srgbClr val="5B6470"/>
+                </a:solidFill>
+                <a:latin typeface="Apple SD Gothic Neo"/>
+              </a:rPr>
+              <a:t>Before/After 수치 화면 (원본: artifacts/runs/ → doc/reports/evidence/metrics/)</a:t>
+            </a:r>
+          </a:p>
+        </p:txBody>
+      </p:sp>
     </p:spTree>
   </p:cSld>
   <p:clrMapOvr>
@@ -4226,8 +4255,8 @@
         </p:nvSpPr>
         <p:spPr>
           <a:xfrm>
-            <a:off x="600000" y="420000"/>
-            <a:ext cx="11000000" cy="900000"/>
+            <a:off x="600000" y="380000"/>
+            <a:ext cx="10992000" cy="900000"/>
           </a:xfrm>
           <a:prstGeom prst="rect">
             <a:avLst/>
@@ -4268,14 +4297,48 @@
         </p:blipFill>
         <p:spPr>
           <a:xfrm>
-            <a:off x="600000" y="1350000"/>
-            <a:ext cx="9758064" cy="4400000"/>
+            <a:off x="600000" y="1400000"/>
+            <a:ext cx="10598669" cy="4780000"/>
           </a:xfrm>
           <a:prstGeom prst="rect">
             <a:avLst/>
           </a:prstGeom>
         </p:spPr>
       </p:pic>
+      <p:sp>
+        <p:nvSpPr>
+          <p:cNvPr id="4" name="TextBox 3"/>
+          <p:cNvSpPr txBox="1"/>
+          <p:nvPr/>
+        </p:nvSpPr>
+        <p:spPr>
+          <a:xfrm>
+            <a:off x="600000" y="6240000"/>
+            <a:ext cx="10992000" cy="300000"/>
+          </a:xfrm>
+          <a:prstGeom prst="rect">
+            <a:avLst/>
+          </a:prstGeom>
+          <a:noFill/>
+        </p:spPr>
+        <p:txBody>
+          <a:bodyPr wrap="none">
+            <a:spAutoFit/>
+          </a:bodyPr>
+          <a:lstStyle/>
+          <a:p>
+            <a:r>
+              <a:rPr sz="1200">
+                <a:solidFill>
+                  <a:srgbClr val="5B6470"/>
+                </a:solidFill>
+                <a:latin typeface="Apple SD Gothic Neo"/>
+              </a:rPr>
+              <a:t>FastAPI 프로세스(:8100) 안의 그래프와, MCP ops 서버(stdio subprocess)·RAG 인덱스·평가 하네스</a:t>
+            </a:r>
+          </a:p>
+        </p:txBody>
+      </p:sp>
     </p:spTree>
   </p:cSld>
   <p:clrMapOvr>
@@ -4302,8 +4365,8 @@
         </p:nvSpPr>
         <p:spPr>
           <a:xfrm>
-            <a:off x="600000" y="420000"/>
-            <a:ext cx="11000000" cy="900000"/>
+            <a:off x="600000" y="380000"/>
+            <a:ext cx="10992000" cy="900000"/>
           </a:xfrm>
           <a:prstGeom prst="rect">
             <a:avLst/>
@@ -4336,8 +4399,8 @@
         </p:nvSpPr>
         <p:spPr>
           <a:xfrm>
-            <a:off x="700000" y="1350000"/>
-            <a:ext cx="10500000" cy="500000"/>
+            <a:off x="600000" y="1400000"/>
+            <a:ext cx="10992000" cy="470000"/>
           </a:xfrm>
           <a:prstGeom prst="rect">
             <a:avLst/>
@@ -4352,7 +4415,7 @@
           <a:p>
             <a:pPr>
               <a:spcAft>
-                <a:spcPts val="1000"/>
+                <a:spcPts val="600"/>
               </a:spcAft>
             </a:pPr>
             <a:r>
@@ -4375,8 +4438,8 @@
         </p:nvSpPr>
         <p:spPr>
           <a:xfrm>
-            <a:off x="700000" y="1870000"/>
-            <a:ext cx="10500000" cy="500000"/>
+            <a:off x="600000" y="1870000"/>
+            <a:ext cx="10992000" cy="470000"/>
           </a:xfrm>
           <a:prstGeom prst="rect">
             <a:avLst/>
@@ -4391,7 +4454,7 @@
           <a:p>
             <a:pPr>
               <a:spcAft>
-                <a:spcPts val="1000"/>
+                <a:spcPts val="600"/>
               </a:spcAft>
             </a:pPr>
             <a:r>
@@ -4414,8 +4477,8 @@
         </p:nvSpPr>
         <p:spPr>
           <a:xfrm>
-            <a:off x="700000" y="2390000"/>
-            <a:ext cx="10500000" cy="500000"/>
+            <a:off x="600000" y="2340000"/>
+            <a:ext cx="10992000" cy="470000"/>
           </a:xfrm>
           <a:prstGeom prst="rect">
             <a:avLst/>
@@ -4430,7 +4493,7 @@
           <a:p>
             <a:pPr>
               <a:spcAft>
-                <a:spcPts val="1000"/>
+                <a:spcPts val="600"/>
               </a:spcAft>
             </a:pPr>
             <a:r>
@@ -4461,14 +4524,48 @@
         </p:blipFill>
         <p:spPr>
           <a:xfrm>
-            <a:off x="600000" y="2910000"/>
-            <a:ext cx="8107202" cy="4400000"/>
+            <a:off x="600000" y="2810000"/>
+            <a:ext cx="6217712" cy="3369999"/>
           </a:xfrm>
           <a:prstGeom prst="rect">
             <a:avLst/>
           </a:prstGeom>
         </p:spPr>
       </p:pic>
+      <p:sp>
+        <p:nvSpPr>
+          <p:cNvPr id="7" name="TextBox 6"/>
+          <p:cNvSpPr txBox="1"/>
+          <p:nvPr/>
+        </p:nvSpPr>
+        <p:spPr>
+          <a:xfrm>
+            <a:off x="600000" y="6239999"/>
+            <a:ext cx="10992000" cy="300000"/>
+          </a:xfrm>
+          <a:prstGeom prst="rect">
+            <a:avLst/>
+          </a:prstGeom>
+          <a:noFill/>
+        </p:spPr>
+        <p:txBody>
+          <a:bodyPr wrap="none">
+            <a:spAutoFit/>
+          </a:bodyPr>
+          <a:lstStyle/>
+          <a:p>
+            <a:r>
+              <a:rPr sz="1200">
+                <a:solidFill>
+                  <a:srgbClr val="5B6470"/>
+                </a:solidFill>
+                <a:latin typeface="Apple SD Gothic Neo"/>
+              </a:rPr>
+              <a:t>실제 SSE 출력 — classifier_source=rag, rag_score=0.6452, rag_margin=0.2177</a:t>
+            </a:r>
+          </a:p>
+        </p:txBody>
+      </p:sp>
     </p:spTree>
   </p:cSld>
   <p:clrMapOvr>
@@ -4495,8 +4592,8 @@
         </p:nvSpPr>
         <p:spPr>
           <a:xfrm>
-            <a:off x="600000" y="420000"/>
-            <a:ext cx="11000000" cy="900000"/>
+            <a:off x="600000" y="380000"/>
+            <a:ext cx="10992000" cy="900000"/>
           </a:xfrm>
           <a:prstGeom prst="rect">
             <a:avLst/>
@@ -4529,8 +4626,8 @@
         </p:nvSpPr>
         <p:spPr>
           <a:xfrm>
-            <a:off x="700000" y="1350000"/>
-            <a:ext cx="10500000" cy="500000"/>
+            <a:off x="600000" y="1400000"/>
+            <a:ext cx="10992000" cy="800000"/>
           </a:xfrm>
           <a:prstGeom prst="rect">
             <a:avLst/>
@@ -4545,7 +4642,7 @@
           <a:p>
             <a:pPr>
               <a:spcAft>
-                <a:spcPts val="1000"/>
+                <a:spcPts val="600"/>
               </a:spcAft>
             </a:pPr>
             <a:r>
@@ -4568,8 +4665,8 @@
         </p:nvSpPr>
         <p:spPr>
           <a:xfrm>
-            <a:off x="700000" y="1870000"/>
-            <a:ext cx="10500000" cy="500000"/>
+            <a:off x="600000" y="2200000"/>
+            <a:ext cx="10992000" cy="470000"/>
           </a:xfrm>
           <a:prstGeom prst="rect">
             <a:avLst/>
@@ -4584,7 +4681,7 @@
           <a:p>
             <a:pPr>
               <a:spcAft>
-                <a:spcPts val="1000"/>
+                <a:spcPts val="600"/>
               </a:spcAft>
             </a:pPr>
             <a:r>
@@ -4607,8 +4704,8 @@
         </p:nvSpPr>
         <p:spPr>
           <a:xfrm>
-            <a:off x="700000" y="2390000"/>
-            <a:ext cx="10500000" cy="500000"/>
+            <a:off x="600000" y="2670000"/>
+            <a:ext cx="10992000" cy="800000"/>
           </a:xfrm>
           <a:prstGeom prst="rect">
             <a:avLst/>
@@ -4623,7 +4720,7 @@
           <a:p>
             <a:pPr>
               <a:spcAft>
-                <a:spcPts val="1000"/>
+                <a:spcPts val="600"/>
               </a:spcAft>
             </a:pPr>
             <a:r>
@@ -4664,8 +4761,8 @@
         </p:nvSpPr>
         <p:spPr>
           <a:xfrm>
-            <a:off x="600000" y="420000"/>
-            <a:ext cx="11000000" cy="900000"/>
+            <a:off x="600000" y="380000"/>
+            <a:ext cx="10992000" cy="900000"/>
           </a:xfrm>
           <a:prstGeom prst="rect">
             <a:avLst/>
@@ -4698,8 +4795,8 @@
         </p:nvSpPr>
         <p:spPr>
           <a:xfrm>
-            <a:off x="700000" y="1350000"/>
-            <a:ext cx="10500000" cy="500000"/>
+            <a:off x="600000" y="1400000"/>
+            <a:ext cx="10992000" cy="470000"/>
           </a:xfrm>
           <a:prstGeom prst="rect">
             <a:avLst/>
@@ -4714,7 +4811,7 @@
           <a:p>
             <a:pPr>
               <a:spcAft>
-                <a:spcPts val="1000"/>
+                <a:spcPts val="600"/>
               </a:spcAft>
             </a:pPr>
             <a:r>
@@ -4737,8 +4834,8 @@
         </p:nvSpPr>
         <p:spPr>
           <a:xfrm>
-            <a:off x="700000" y="1870000"/>
-            <a:ext cx="10500000" cy="500000"/>
+            <a:off x="600000" y="1870000"/>
+            <a:ext cx="10992000" cy="470000"/>
           </a:xfrm>
           <a:prstGeom prst="rect">
             <a:avLst/>
@@ -4753,7 +4850,7 @@
           <a:p>
             <a:pPr>
               <a:spcAft>
-                <a:spcPts val="1000"/>
+                <a:spcPts val="600"/>
               </a:spcAft>
             </a:pPr>
             <a:r>
@@ -4776,8 +4873,8 @@
         </p:nvSpPr>
         <p:spPr>
           <a:xfrm>
-            <a:off x="700000" y="2390000"/>
-            <a:ext cx="10500000" cy="500000"/>
+            <a:off x="600000" y="2340000"/>
+            <a:ext cx="10992000" cy="470000"/>
           </a:xfrm>
           <a:prstGeom prst="rect">
             <a:avLst/>
@@ -4792,7 +4889,7 @@
           <a:p>
             <a:pPr>
               <a:spcAft>
-                <a:spcPts val="1000"/>
+                <a:spcPts val="600"/>
               </a:spcAft>
             </a:pPr>
             <a:r>
@@ -4815,8 +4912,8 @@
         </p:nvSpPr>
         <p:spPr>
           <a:xfrm>
-            <a:off x="700000" y="2910000"/>
-            <a:ext cx="10500000" cy="500000"/>
+            <a:off x="600000" y="2810000"/>
+            <a:ext cx="10992000" cy="470000"/>
           </a:xfrm>
           <a:prstGeom prst="rect">
             <a:avLst/>
@@ -4831,7 +4928,7 @@
           <a:p>
             <a:pPr>
               <a:spcAft>
-                <a:spcPts val="1000"/>
+                <a:spcPts val="600"/>
               </a:spcAft>
             </a:pPr>
             <a:r>
@@ -4854,8 +4951,8 @@
         </p:nvSpPr>
         <p:spPr>
           <a:xfrm>
-            <a:off x="700000" y="3430000"/>
-            <a:ext cx="10500000" cy="500000"/>
+            <a:off x="600000" y="3280000"/>
+            <a:ext cx="10992000" cy="470000"/>
           </a:xfrm>
           <a:prstGeom prst="rect">
             <a:avLst/>
@@ -4870,7 +4967,7 @@
           <a:p>
             <a:pPr>
               <a:spcAft>
-                <a:spcPts val="1000"/>
+                <a:spcPts val="600"/>
               </a:spcAft>
             </a:pPr>
             <a:r>
@@ -4893,8 +4990,8 @@
         </p:nvSpPr>
         <p:spPr>
           <a:xfrm>
-            <a:off x="700000" y="3950000"/>
-            <a:ext cx="10500000" cy="500000"/>
+            <a:off x="600000" y="3750000"/>
+            <a:ext cx="10992000" cy="470000"/>
           </a:xfrm>
           <a:prstGeom prst="rect">
             <a:avLst/>
@@ -4909,7 +5006,7 @@
           <a:p>
             <a:pPr>
               <a:spcAft>
-                <a:spcPts val="1000"/>
+                <a:spcPts val="600"/>
               </a:spcAft>
             </a:pPr>
             <a:r>
